--- a/Cpi_Inflation_Presentation.pptx
+++ b/Cpi_Inflation_Presentation.pptx
@@ -1,9 +1,12 @@
 
 <file path=ppt/presentation.xml><?xml version="1.0" encoding="utf-8"?>
-<p:presentation xmlns:a="http://schemas.openxmlformats.org/drawingml/2006/main" xmlns:r="http://schemas.openxmlformats.org/officeDocument/2006/relationships" xmlns:p="http://schemas.openxmlformats.org/presentationml/2006/main" saveSubsetFonts="true" autoCompressPictures="0" embedTrueTypeFonts="true">
+<p:presentation xmlns:a="http://schemas.openxmlformats.org/drawingml/2006/main" xmlns:r="http://schemas.openxmlformats.org/officeDocument/2006/relationships" xmlns:p="http://schemas.openxmlformats.org/presentationml/2006/main" embedTrueTypeFonts="1" saveSubsetFonts="1" autoCompressPictures="0">
   <p:sldMasterIdLst>
     <p:sldMasterId id="2147483648" r:id="rId1"/>
   </p:sldMasterIdLst>
+  <p:notesMasterIdLst>
+    <p:notesMasterId r:id="rId12"/>
+  </p:notesMasterIdLst>
   <p:sldIdLst>
     <p:sldId id="256" r:id="rId2"/>
     <p:sldId id="257" r:id="rId3"/>
@@ -16,35 +19,23 @@
     <p:sldId id="264" r:id="rId10"/>
     <p:sldId id="265" r:id="rId11"/>
   </p:sldIdLst>
-  <p:notesMasterIdLst>
-    <p:notesMasterId r:id="rId12"/>
-  </p:notesMasterIdLst>
-  <p:sldSz cx="12191695" cy="6858000"/>
-  <p:notesSz cx="6858000" cy="12191695"/>
+  <p:sldSz cx="12192000" cy="6858000"/>
+  <p:notesSz cx="6858000" cy="12192000"/>
   <p:embeddedFontLst>
     <p:embeddedFont>
-      <p:font typeface="Roboto"/>
-      <p:regular r:id="rId201314"/>
+      <p:font typeface="Roboto" panose="02000000000000000000" pitchFamily="2" charset="0"/>
+      <p:regular r:id="rId13"/>
+      <p:bold r:id="rId14"/>
+      <p:italic r:id="rId15"/>
     </p:embeddedFont>
     <p:embeddedFont>
-      <p:font typeface="Roboto Medium"/>
-      <p:regular r:id="rId201315"/>
-    </p:embeddedFont>
-    <p:embeddedFont>
-      <p:font typeface="Roboto Bold"/>
-      <p:regular r:id="rId201316"/>
-    </p:embeddedFont>
-    <p:embeddedFont>
-      <p:font typeface="Saira"/>
-      <p:regular r:id="rId201317"/>
+      <p:font typeface="Roboto Bold" panose="02000000000000000000" pitchFamily="2" charset="0"/>
+      <p:regular r:id="rId16"/>
+      <p:bold r:id="rId17"/>
     </p:embeddedFont>
     <p:embeddedFont>
       <p:font typeface="Saira Medium"/>
-      <p:regular r:id="rId201318"/>
-    </p:embeddedFont>
-    <p:embeddedFont>
-      <p:font typeface="Saira Bold"/>
-      <p:regular r:id="rId201319"/>
+      <p:regular r:id="rId18"/>
     </p:embeddedFont>
   </p:embeddedFontLst>
   <p:defaultTextStyle>
@@ -139,6 +130,11 @@
       </a:defRPr>
     </a:lvl9pPr>
   </p:defaultTextStyle>
+  <p:extLst>
+    <p:ext uri="{EFAFB233-063F-42B5-8137-9DF3F51BA10A}">
+      <p15:sldGuideLst xmlns:p15="http://schemas.microsoft.com/office/powerpoint/2012/main"/>
+    </p:ext>
+  </p:extLst>
 </p:presentation>
 </file>
 
@@ -164,234 +160,10 @@
           <a:chExt cx="0" cy="0"/>
         </a:xfrm>
       </p:grpSpPr>
-      <p:sp>
-        <p:nvSpPr>
-          <p:cNvPr id="2" name="Header Placeholder 1"/>
-          <p:cNvSpPr>
-            <a:spLocks noGrp="1"/>
-          </p:cNvSpPr>
-          <p:nvPr>
-            <p:ph type="hdr" sz="quarter"/>
-          </p:nvPr>
-        </p:nvSpPr>
-        <p:spPr>
-          <a:xfrm>
-            <a:off x="0" y="0"/>
-            <a:ext cx="2971800" cy="458788"/>
-          </a:xfrm>
-          <a:prstGeom prst="rect">
-            <a:avLst/>
-          </a:prstGeom>
-        </p:spPr>
-        <p:txBody>
-          <a:bodyPr vert="horz" lIns="91440" tIns="45720" rIns="91440" bIns="45720" rtlCol="0"/>
-          <a:lstStyle>
-            <a:lvl1pPr algn="l">
-              <a:defRPr sz="1200"/>
-            </a:lvl1pPr>
-          </a:lstStyle>
-          <a:p>
-            <a:endParaRPr lang="en-US"/>
-          </a:p>
-        </p:txBody>
-      </p:sp>
-      <p:sp>
-        <p:nvSpPr>
-          <p:cNvPr id="3" name="Date Placeholder 2"/>
-          <p:cNvSpPr>
-            <a:spLocks noGrp="1"/>
-          </p:cNvSpPr>
-          <p:nvPr>
-            <p:ph type="dt" idx="1"/>
-          </p:nvPr>
-        </p:nvSpPr>
-        <p:spPr>
-          <a:xfrm>
-            <a:off x="3884613" y="0"/>
-            <a:ext cx="2971800" cy="458788"/>
-          </a:xfrm>
-          <a:prstGeom prst="rect">
-            <a:avLst/>
-          </a:prstGeom>
-        </p:spPr>
-        <p:txBody>
-          <a:bodyPr vert="horz" lIns="91440" tIns="45720" rIns="91440" bIns="45720" rtlCol="0"/>
-          <a:lstStyle>
-            <a:lvl1pPr algn="r">
-              <a:defRPr sz="1200"/>
-            </a:lvl1pPr>
-          </a:lstStyle>
-          <a:p>
-            <a:fld id="{5282F153-3F37-0F45-9E97-73ACFA13230C}" type="datetimeFigureOut">
-              <a:rPr lang="en-US"/>
-              <a:t>7/23/19</a:t>
-            </a:fld>
-            <a:endParaRPr lang="en-US"/>
-          </a:p>
-        </p:txBody>
-      </p:sp>
-      <p:sp>
-        <p:nvSpPr>
-          <p:cNvPr id="4" name="Slide Image Placeholder 3"/>
-          <p:cNvSpPr>
-            <a:spLocks noGrp="1" noRot="1" noChangeAspect="1"/>
-          </p:cNvSpPr>
-          <p:nvPr>
-            <p:ph type="sldImg" idx="2"/>
-          </p:nvPr>
-        </p:nvSpPr>
-        <p:spPr>
-          <a:xfrm>
-            <a:off x="685800" y="1143000"/>
-            <a:ext cx="5486400" cy="3086100"/>
-          </a:xfrm>
-          <a:prstGeom prst="rect">
-            <a:avLst/>
-          </a:prstGeom>
-          <a:noFill/>
-          <a:ln w="12700">
-            <a:solidFill>
-              <a:prstClr val="black"/>
-            </a:solidFill>
-          </a:ln>
-        </p:spPr>
-        <p:txBody>
-          <a:bodyPr vert="horz" lIns="91440" tIns="45720" rIns="91440" bIns="45720" rtlCol="0" anchor="ctr"/>
-          <a:lstStyle/>
-          <a:p>
-            <a:endParaRPr lang="en-US"/>
-          </a:p>
-        </p:txBody>
-      </p:sp>
-      <p:sp>
-        <p:nvSpPr>
-          <p:cNvPr id="5" name="Notes Placeholder 4"/>
-          <p:cNvSpPr>
-            <a:spLocks noGrp="1"/>
-          </p:cNvSpPr>
-          <p:nvPr>
-            <p:ph type="body" sz="quarter" idx="3"/>
-          </p:nvPr>
-        </p:nvSpPr>
-        <p:spPr>
-          <a:xfrm>
-            <a:off x="685800" y="4400550"/>
-            <a:ext cx="5486400" cy="3600450"/>
-          </a:xfrm>
-          <a:prstGeom prst="rect">
-            <a:avLst/>
-          </a:prstGeom>
-        </p:spPr>
-        <p:txBody>
-          <a:bodyPr vert="horz" lIns="91440" tIns="45720" rIns="91440" bIns="45720" rtlCol="0"/>
-          <a:lstStyle/>
-          <a:p>
-            <a:pPr lvl="0"/>
-            <a:r>
-              <a:rPr lang="en-US"/>
-              <a:t>Click to edit Master text styles</a:t>
-            </a:r>
-          </a:p>
-          <a:p>
-            <a:pPr lvl="1"/>
-            <a:r>
-              <a:rPr lang="en-US"/>
-              <a:t>Second level</a:t>
-            </a:r>
-          </a:p>
-          <a:p>
-            <a:pPr lvl="2"/>
-            <a:r>
-              <a:rPr lang="en-US"/>
-              <a:t>Third level</a:t>
-            </a:r>
-          </a:p>
-          <a:p>
-            <a:pPr lvl="3"/>
-            <a:r>
-              <a:rPr lang="en-US"/>
-              <a:t>Fourth level</a:t>
-            </a:r>
-          </a:p>
-          <a:p>
-            <a:pPr lvl="4"/>
-            <a:r>
-              <a:rPr lang="en-US"/>
-              <a:t>Fifth level</a:t>
-            </a:r>
-          </a:p>
-        </p:txBody>
-      </p:sp>
-      <p:sp>
-        <p:nvSpPr>
-          <p:cNvPr id="6" name="Footer Placeholder 5"/>
-          <p:cNvSpPr>
-            <a:spLocks noGrp="1"/>
-          </p:cNvSpPr>
-          <p:nvPr>
-            <p:ph type="ftr" sz="quarter" idx="4"/>
-          </p:nvPr>
-        </p:nvSpPr>
-        <p:spPr>
-          <a:xfrm>
-            <a:off x="0" y="8685213"/>
-            <a:ext cx="2971800" cy="458787"/>
-          </a:xfrm>
-          <a:prstGeom prst="rect">
-            <a:avLst/>
-          </a:prstGeom>
-        </p:spPr>
-        <p:txBody>
-          <a:bodyPr vert="horz" lIns="91440" tIns="45720" rIns="91440" bIns="45720" rtlCol="0" anchor="b"/>
-          <a:lstStyle>
-            <a:lvl1pPr algn="l">
-              <a:defRPr sz="1200"/>
-            </a:lvl1pPr>
-          </a:lstStyle>
-          <a:p>
-            <a:endParaRPr lang="en-US"/>
-          </a:p>
-        </p:txBody>
-      </p:sp>
-      <p:sp>
-        <p:nvSpPr>
-          <p:cNvPr id="7" name="Slide Number Placeholder 6"/>
-          <p:cNvSpPr>
-            <a:spLocks noGrp="1"/>
-          </p:cNvSpPr>
-          <p:nvPr>
-            <p:ph type="sldNum" sz="quarter" idx="5"/>
-          </p:nvPr>
-        </p:nvSpPr>
-        <p:spPr>
-          <a:xfrm>
-            <a:off x="3884613" y="8685213"/>
-            <a:ext cx="2971800" cy="458787"/>
-          </a:xfrm>
-          <a:prstGeom prst="rect">
-            <a:avLst/>
-          </a:prstGeom>
-        </p:spPr>
-        <p:txBody>
-          <a:bodyPr vert="horz" lIns="91440" tIns="45720" rIns="91440" bIns="45720" rtlCol="0" anchor="b"/>
-          <a:lstStyle>
-            <a:lvl1pPr algn="r">
-              <a:defRPr sz="1200"/>
-            </a:lvl1pPr>
-          </a:lstStyle>
-          <a:p>
-            <a:fld id="{CE5E9CC1-C706-0F49-92D6-E571CC5EEA8F}" type="slidenum">
-              <a:rPr lang="en-US"/>
-              <a:t>‹#›</a:t>
-            </a:fld>
-            <a:endParaRPr lang="en-US"/>
-          </a:p>
-        </p:txBody>
-      </p:sp>
     </p:spTree>
     <p:extLst>
       <p:ext uri="{BB962C8B-B14F-4D97-AF65-F5344CB8AC3E}">
-        <p14:creationId xmlns:p14="http://schemas.microsoft.com/office/powerpoint/2010/main" val="1024086991"/>
+        <p14:creationId xmlns:p14="http://schemas.microsoft.com/office/powerpoint/2010/main" val="149672179"/>
       </p:ext>
     </p:extLst>
   </p:cSld>
@@ -535,10 +307,6 @@
           <a:bodyPr/>
           <a:lstStyle/>
           <a:p>
-            <a:r>
-              <a:rPr lang="en-US" dirty="0"/>
-              <a:t/>
-            </a:r>
             <a:endParaRPr lang="en-US" dirty="0"/>
           </a:p>
         </p:txBody>
@@ -623,10 +391,6 @@
           <a:bodyPr/>
           <a:lstStyle/>
           <a:p>
-            <a:r>
-              <a:rPr lang="en-US" dirty="0"/>
-              <a:t/>
-            </a:r>
             <a:endParaRPr lang="en-US" dirty="0"/>
           </a:p>
         </p:txBody>
@@ -711,10 +475,6 @@
           <a:bodyPr/>
           <a:lstStyle/>
           <a:p>
-            <a:r>
-              <a:rPr lang="en-US" dirty="0"/>
-              <a:t/>
-            </a:r>
             <a:endParaRPr lang="en-US" dirty="0"/>
           </a:p>
         </p:txBody>
@@ -799,10 +559,6 @@
           <a:bodyPr/>
           <a:lstStyle/>
           <a:p>
-            <a:r>
-              <a:rPr lang="en-US" dirty="0"/>
-              <a:t/>
-            </a:r>
             <a:endParaRPr lang="en-US" dirty="0"/>
           </a:p>
         </p:txBody>
@@ -887,10 +643,6 @@
           <a:bodyPr/>
           <a:lstStyle/>
           <a:p>
-            <a:r>
-              <a:rPr lang="en-US" dirty="0"/>
-              <a:t/>
-            </a:r>
             <a:endParaRPr lang="en-US" dirty="0"/>
           </a:p>
         </p:txBody>
@@ -975,10 +727,6 @@
           <a:bodyPr/>
           <a:lstStyle/>
           <a:p>
-            <a:r>
-              <a:rPr lang="en-US" dirty="0"/>
-              <a:t/>
-            </a:r>
             <a:endParaRPr lang="en-US" dirty="0"/>
           </a:p>
         </p:txBody>
@@ -1063,10 +811,6 @@
           <a:bodyPr/>
           <a:lstStyle/>
           <a:p>
-            <a:r>
-              <a:rPr lang="en-US" dirty="0"/>
-              <a:t/>
-            </a:r>
             <a:endParaRPr lang="en-US" dirty="0"/>
           </a:p>
         </p:txBody>
@@ -1151,10 +895,6 @@
           <a:bodyPr/>
           <a:lstStyle/>
           <a:p>
-            <a:r>
-              <a:rPr lang="en-US" dirty="0"/>
-              <a:t/>
-            </a:r>
             <a:endParaRPr lang="en-US" dirty="0"/>
           </a:p>
         </p:txBody>
@@ -1239,10 +979,6 @@
           <a:bodyPr/>
           <a:lstStyle/>
           <a:p>
-            <a:r>
-              <a:rPr lang="en-US" dirty="0"/>
-              <a:t/>
-            </a:r>
             <a:endParaRPr lang="en-US" dirty="0"/>
           </a:p>
         </p:txBody>
@@ -1327,10 +1063,6 @@
           <a:bodyPr/>
           <a:lstStyle/>
           <a:p>
-            <a:r>
-              <a:rPr lang="en-US" dirty="0"/>
-              <a:t/>
-            </a:r>
             <a:endParaRPr lang="en-US" dirty="0"/>
           </a:p>
         </p:txBody>
@@ -1420,14 +1152,14 @@
       </p:grpSpPr>
       <p:pic>
         <p:nvPicPr>
-          <p:cNvPr id="2" name="Image 0" descr="preencoded.png">    </p:cNvPr>
+          <p:cNvPr id="2" name="Image 0" descr="preencoded.png"/>
           <p:cNvPicPr>
             <a:picLocks noChangeAspect="1"/>
           </p:cNvPicPr>
           <p:nvPr/>
         </p:nvPicPr>
         <p:blipFill>
-          <a:blip r:embed="rId1"/>
+          <a:blip r:embed="rId2"/>
           <a:stretch>
             <a:fillRect/>
           </a:stretch>
@@ -1463,11 +1195,18 @@
           </a:solidFill>
           <a:ln/>
         </p:spPr>
+        <p:txBody>
+          <a:bodyPr/>
+          <a:lstStyle/>
+          <a:p>
+            <a:endParaRPr lang="en-US"/>
+          </a:p>
+        </p:txBody>
       </p:sp>
       <p:pic>
         <p:nvPicPr>
           <p:cNvPr id="4" name="Image 1" descr="preencoded.png">
-            <a:hlinkClick r:id="rId3" tooltip=""/>
+            <a:hlinkClick r:id="rId3"/>
           </p:cNvPr>
           <p:cNvPicPr>
             <a:picLocks noChangeAspect="1"/>
@@ -1475,7 +1214,7 @@
           <p:nvPr/>
         </p:nvPicPr>
         <p:blipFill>
-          <a:blip r:embed="rId2"/>
+          <a:blip r:embed="rId4"/>
           <a:stretch>
             <a:fillRect/>
           </a:stretch>
@@ -1501,6 +1240,11 @@
 <file path=ppt/slideMasters/slideMaster1.xml><?xml version="1.0" encoding="utf-8"?>
 <p:sldMaster xmlns:a="http://schemas.openxmlformats.org/drawingml/2006/main" xmlns:r="http://schemas.openxmlformats.org/officeDocument/2006/relationships" xmlns:p="http://schemas.openxmlformats.org/presentationml/2006/main">
   <p:cSld>
+    <p:bg>
+      <p:bgRef idx="1001">
+        <a:schemeClr val="bg1"/>
+      </p:bgRef>
+    </p:bg>
     <p:spTree>
       <p:nvGrpSpPr>
         <p:cNvPr id="1" name=""/>
@@ -1795,14 +1539,14 @@
       </p:grpSpPr>
       <p:pic>
         <p:nvPicPr>
-          <p:cNvPr id="2" name="Image 0" descr="preencoded.png">    </p:cNvPr>
+          <p:cNvPr id="2" name="Image 0" descr="preencoded.png"/>
           <p:cNvPicPr>
             <a:picLocks noChangeAspect="1"/>
           </p:cNvPicPr>
           <p:nvPr/>
         </p:nvPicPr>
         <p:blipFill>
-          <a:blip r:embed="rId1"/>
+          <a:blip r:embed="rId3"/>
           <a:stretch>
             <a:fillRect/>
           </a:stretch>
@@ -1838,7 +1582,7 @@
           <a:bodyPr wrap="none" lIns="0" tIns="0" rIns="0" bIns="0" rtlCol="0" anchor="t"/>
           <a:lstStyle/>
           <a:p>
-            <a:pPr algn="l" indent="0" marL="0">
+            <a:pPr marL="0" indent="0" algn="l">
               <a:lnSpc>
                 <a:spcPct val="104000"/>
               </a:lnSpc>
@@ -1853,7 +1597,7 @@
                 <a:ea typeface="Saira Medium" pitchFamily="34" charset="-122"/>
                 <a:cs typeface="Saira Medium" pitchFamily="34" charset="-120"/>
               </a:rPr>
-              <a:t>INDIA CPI INFLATION</a:t>
+              <a:t>CPI INFLATION</a:t>
             </a:r>
             <a:endParaRPr lang="en-US" sz="3700" dirty="0"/>
           </a:p>
@@ -1867,7 +1611,7 @@
         </p:nvSpPr>
         <p:spPr>
           <a:xfrm>
-            <a:off x="661475" y="2271316"/>
+            <a:off x="844355" y="2365970"/>
             <a:ext cx="6906444" cy="302419"/>
           </a:xfrm>
           <a:prstGeom prst="rect">
@@ -1880,7 +1624,7 @@
           <a:bodyPr wrap="none" lIns="0" tIns="0" rIns="0" bIns="0" rtlCol="0" anchor="t"/>
           <a:lstStyle/>
           <a:p>
-            <a:pPr algn="l" indent="0" marL="0">
+            <a:pPr marL="0" indent="0" algn="l">
               <a:lnSpc>
                 <a:spcPct val="133000"/>
               </a:lnSpc>
@@ -1895,7 +1639,7 @@
                 <a:ea typeface="Roboto" pitchFamily="34" charset="-122"/>
                 <a:cs typeface="Roboto" pitchFamily="34" charset="-120"/>
               </a:rPr>
-              <a:t>Analytical Case Study · National Statistical Office data</a:t>
+              <a:t>Analytical Case Study </a:t>
             </a:r>
             <a:endParaRPr lang="en-US" sz="1450" dirty="0"/>
           </a:p>
@@ -1924,7 +1668,7 @@
           </a:bodyPr>
           <a:lstStyle/>
           <a:p>
-            <a:pPr algn="l" marL="294640" indent="-294640">
+            <a:pPr marL="294640" indent="-294640" algn="l">
               <a:lnSpc>
                 <a:spcPct val="133000"/>
               </a:lnSpc>
@@ -1945,7 +1689,7 @@
             <a:endParaRPr lang="en-US" sz="1450" dirty="0"/>
           </a:p>
           <a:p>
-            <a:pPr algn="l" marL="294640" indent="-294640">
+            <a:pPr marL="294640" indent="-294640" algn="l">
               <a:lnSpc>
                 <a:spcPct val="133000"/>
               </a:lnSpc>
@@ -1966,7 +1710,7 @@
             <a:endParaRPr lang="en-US" sz="1450" dirty="0"/>
           </a:p>
           <a:p>
-            <a:pPr algn="l" marL="294640" indent="-294640">
+            <a:pPr marL="294640" indent="-294640" algn="l">
               <a:lnSpc>
                 <a:spcPct val="133000"/>
               </a:lnSpc>
@@ -1982,8 +1726,17 @@
                 <a:ea typeface="Roboto" pitchFamily="34" charset="-122"/>
                 <a:cs typeface="Roboto" pitchFamily="34" charset="-120"/>
               </a:rPr>
-              <a:t>Coding Ninjas · Data Analytics Assignment</a:t>
-            </a:r>
+              <a:t>Coding Ninjas · Data Analytics Case Study</a:t>
+            </a:r>
+          </a:p>
+          <a:p>
+            <a:pPr marL="294640" indent="-294640" algn="l">
+              <a:lnSpc>
+                <a:spcPct val="133000"/>
+              </a:lnSpc>
+              <a:buSzPct val="100000"/>
+              <a:buChar char="•"/>
+            </a:pPr>
             <a:endParaRPr lang="en-US" sz="1450" dirty="0"/>
           </a:p>
         </p:txBody>
@@ -2009,14 +1762,13 @@
           <a:bodyPr wrap="square" lIns="0" tIns="0" rIns="0" bIns="0" rtlCol="0" anchor="t"/>
           <a:lstStyle/>
           <a:p>
-            <a:pPr algn="l" indent="0" marL="0">
+            <a:pPr>
               <a:lnSpc>
                 <a:spcPct val="133000"/>
               </a:lnSpc>
               <a:spcAft>
                 <a:spcPts val="1650"/>
               </a:spcAft>
-              <a:buNone/>
             </a:pPr>
             <a:r>
               <a:rPr lang="en-US" sz="1450" b="1" dirty="0">
@@ -2029,15 +1781,6 @@
               </a:rPr>
               <a:t>Built By Jayesh — Data Analyst</a:t>
             </a:r>
-            <a:pPr algn="l" indent="0" marL="0">
-              <a:lnSpc>
-                <a:spcPct val="133000"/>
-              </a:lnSpc>
-              <a:spcAft>
-                <a:spcPts val="1650"/>
-              </a:spcAft>
-              <a:buNone/>
-            </a:pPr>
             <a:r>
               <a:rPr lang="en-US" sz="1450" dirty="0">
                 <a:solidFill>
@@ -2049,15 +1792,41 @@
               </a:rPr>
               <a:t> </a:t>
             </a:r>
-            <a:pPr algn="l" indent="0" marL="0">
-              <a:lnSpc>
-                <a:spcPct val="133000"/>
-              </a:lnSpc>
-              <a:spcAft>
-                <a:spcPts val="1650"/>
-              </a:spcAft>
-              <a:buNone/>
-            </a:pPr>
+            <a:r>
+              <a:rPr lang="en-US" sz="1450" b="1" dirty="0">
+                <a:solidFill>
+                  <a:srgbClr val="E5E0DF"/>
+                </a:solidFill>
+                <a:latin typeface="Roboto" pitchFamily="34" charset="0"/>
+                <a:ea typeface="Roboto" pitchFamily="34" charset="-122"/>
+                <a:cs typeface="Roboto" pitchFamily="34" charset="-120"/>
+                <a:hlinkClick r:id="rId4"/>
+              </a:rPr>
+              <a:t>Linkedin </a:t>
+            </a:r>
+            <a:r>
+              <a:rPr lang="en-US" sz="1450" dirty="0">
+                <a:solidFill>
+                  <a:srgbClr val="E5E0DF"/>
+                </a:solidFill>
+                <a:latin typeface="Roboto" pitchFamily="34" charset="0"/>
+                <a:ea typeface="Roboto" pitchFamily="34" charset="-122"/>
+                <a:cs typeface="Roboto" pitchFamily="34" charset="-120"/>
+                <a:hlinkClick r:id="rId4"/>
+              </a:rPr>
+              <a:t>·</a:t>
+            </a:r>
+            <a:r>
+              <a:rPr lang="en-US" sz="1450" dirty="0">
+                <a:solidFill>
+                  <a:srgbClr val="E5E0DF"/>
+                </a:solidFill>
+                <a:latin typeface="Roboto" pitchFamily="34" charset="0"/>
+                <a:ea typeface="Roboto" pitchFamily="34" charset="-122"/>
+                <a:cs typeface="Roboto" pitchFamily="34" charset="-120"/>
+              </a:rPr>
+              <a:t> </a:t>
+            </a:r>
             <a:r>
               <a:rPr lang="en-US" sz="1450" b="1" u="sng" dirty="0">
                 <a:solidFill>
@@ -2066,67 +1835,14 @@
                 <a:latin typeface="Roboto Bold" pitchFamily="34" charset="0"/>
                 <a:ea typeface="Roboto Bold" pitchFamily="34" charset="-122"/>
                 <a:cs typeface="Roboto Bold" pitchFamily="34" charset="-120"/>
-                <a:hlinkClick r:id="rId2" invalidUrl="" action="" tgtFrame="" tooltip="" history="1" highlightClick="0" endSnd="0">
-                  <a:extLst>
-                    <a:ext uri="{A12FA001-AC4F-418D-AE19-62706E023703}">
-                      <ahyp:hlinkClr xmlns:ahyp="http://schemas.microsoft.com/office/drawing/2018/hyperlinkcolor" val="tx"/>
-                    </a:ext>
-                  </a:extLst>
-                </a:hlinkClick>
-              </a:rPr>
-              <a:t>LinkedIn</a:t>
-            </a:r>
-            <a:pPr algn="l" indent="0" marL="0">
-              <a:lnSpc>
-                <a:spcPct val="133000"/>
-              </a:lnSpc>
-              <a:spcAft>
-                <a:spcPts val="1650"/>
-              </a:spcAft>
-              <a:buNone/>
-            </a:pPr>
-            <a:r>
-              <a:rPr lang="en-US" sz="1450" dirty="0">
-                <a:solidFill>
-                  <a:srgbClr val="E5E0DF"/>
-                </a:solidFill>
-                <a:latin typeface="Roboto" pitchFamily="34" charset="0"/>
-                <a:ea typeface="Roboto" pitchFamily="34" charset="-122"/>
-                <a:cs typeface="Roboto" pitchFamily="34" charset="-120"/>
-              </a:rPr>
-              <a:t> · </a:t>
-            </a:r>
-            <a:pPr algn="l" indent="0" marL="0">
-              <a:lnSpc>
-                <a:spcPct val="133000"/>
-              </a:lnSpc>
-              <a:spcAft>
-                <a:spcPts val="1650"/>
-              </a:spcAft>
-              <a:buNone/>
-            </a:pPr>
-            <a:r>
-              <a:rPr lang="en-US" sz="1450" b="1" u="sng" dirty="0">
-                <a:solidFill>
-                  <a:srgbClr val="FC8337"/>
-                </a:solidFill>
-                <a:latin typeface="Roboto Bold" pitchFamily="34" charset="0"/>
-                <a:ea typeface="Roboto Bold" pitchFamily="34" charset="-122"/>
-                <a:cs typeface="Roboto Bold" pitchFamily="34" charset="-120"/>
-                <a:hlinkClick r:id="rId3" invalidUrl="" action="" tgtFrame="" tooltip="" history="1" highlightClick="0" endSnd="0">
-                  <a:extLst>
-                    <a:ext uri="{A12FA001-AC4F-418D-AE19-62706E023703}">
-                      <ahyp:hlinkClr xmlns:ahyp="http://schemas.microsoft.com/office/drawing/2018/hyperlinkcolor" val="tx"/>
-                    </a:ext>
-                  </a:extLst>
-                </a:hlinkClick>
-              </a:rPr>
-              <a:t>Portfolio</a:t>
+                <a:hlinkClick r:id="rId5"/>
+              </a:rPr>
+              <a:t>Portfolio / Github</a:t>
             </a:r>
             <a:endParaRPr lang="en-US" sz="1450" dirty="0"/>
           </a:p>
           <a:p>
-            <a:pPr algn="l" indent="0" marL="0">
+            <a:pPr marL="0" indent="0" algn="l">
               <a:lnSpc>
                 <a:spcPct val="133000"/>
               </a:lnSpc>
@@ -2193,7 +1909,7 @@
           <a:bodyPr wrap="none" lIns="0" tIns="0" rIns="0" bIns="0" rtlCol="0" anchor="t"/>
           <a:lstStyle/>
           <a:p>
-            <a:pPr algn="l" indent="0" marL="0">
+            <a:pPr marL="0" indent="0" algn="l">
               <a:lnSpc>
                 <a:spcPct val="104000"/>
               </a:lnSpc>
@@ -2235,7 +1951,7 @@
           <a:bodyPr wrap="none" lIns="0" tIns="0" rIns="0" bIns="0" rtlCol="0" anchor="t"/>
           <a:lstStyle/>
           <a:p>
-            <a:pPr algn="l" indent="0" marL="0">
+            <a:pPr marL="0" indent="0" algn="l">
               <a:lnSpc>
                 <a:spcPct val="104000"/>
               </a:lnSpc>
@@ -2282,6 +1998,13 @@
             <a:prstDash val="solid"/>
           </a:ln>
         </p:spPr>
+        <p:txBody>
+          <a:bodyPr/>
+          <a:lstStyle/>
+          <a:p>
+            <a:endParaRPr lang="en-US"/>
+          </a:p>
+        </p:txBody>
       </p:sp>
       <p:sp>
         <p:nvSpPr>
@@ -2304,7 +2027,7 @@
           <a:bodyPr wrap="none" lIns="0" tIns="0" rIns="0" bIns="0" rtlCol="0" anchor="ctr"/>
           <a:lstStyle/>
           <a:p>
-            <a:pPr algn="ctr" indent="0" marL="0">
+            <a:pPr marL="0" indent="0" algn="ctr">
               <a:lnSpc>
                 <a:spcPct val="100000"/>
               </a:lnSpc>
@@ -2346,7 +2069,7 @@
           <a:bodyPr wrap="none" lIns="0" tIns="0" rIns="0" bIns="0" rtlCol="0" anchor="t"/>
           <a:lstStyle/>
           <a:p>
-            <a:pPr algn="l" indent="0" marL="0">
+            <a:pPr marL="0" indent="0" algn="l">
               <a:lnSpc>
                 <a:spcPct val="104000"/>
               </a:lnSpc>
@@ -2388,7 +2111,7 @@
           <a:bodyPr wrap="none" lIns="0" tIns="0" rIns="0" bIns="0" rtlCol="0" anchor="t"/>
           <a:lstStyle/>
           <a:p>
-            <a:pPr algn="l" indent="0" marL="0">
+            <a:pPr marL="0" indent="0" algn="l">
               <a:lnSpc>
                 <a:spcPct val="119000"/>
               </a:lnSpc>
@@ -2435,6 +2158,13 @@
             <a:prstDash val="solid"/>
           </a:ln>
         </p:spPr>
+        <p:txBody>
+          <a:bodyPr/>
+          <a:lstStyle/>
+          <a:p>
+            <a:endParaRPr lang="en-US"/>
+          </a:p>
+        </p:txBody>
       </p:sp>
       <p:sp>
         <p:nvSpPr>
@@ -2457,7 +2187,7 @@
           <a:bodyPr wrap="none" lIns="0" tIns="0" rIns="0" bIns="0" rtlCol="0" anchor="ctr"/>
           <a:lstStyle/>
           <a:p>
-            <a:pPr algn="ctr" indent="0" marL="0">
+            <a:pPr marL="0" indent="0" algn="ctr">
               <a:lnSpc>
                 <a:spcPct val="100000"/>
               </a:lnSpc>
@@ -2499,7 +2229,7 @@
           <a:bodyPr wrap="none" lIns="0" tIns="0" rIns="0" bIns="0" rtlCol="0" anchor="t"/>
           <a:lstStyle/>
           <a:p>
-            <a:pPr algn="l" indent="0" marL="0">
+            <a:pPr marL="0" indent="0" algn="l">
               <a:lnSpc>
                 <a:spcPct val="104000"/>
               </a:lnSpc>
@@ -2541,7 +2271,7 @@
           <a:bodyPr wrap="none" lIns="0" tIns="0" rIns="0" bIns="0" rtlCol="0" anchor="t"/>
           <a:lstStyle/>
           <a:p>
-            <a:pPr algn="l" indent="0" marL="0">
+            <a:pPr marL="0" indent="0" algn="l">
               <a:lnSpc>
                 <a:spcPct val="119000"/>
               </a:lnSpc>
@@ -2588,6 +2318,13 @@
             <a:prstDash val="solid"/>
           </a:ln>
         </p:spPr>
+        <p:txBody>
+          <a:bodyPr/>
+          <a:lstStyle/>
+          <a:p>
+            <a:endParaRPr lang="en-US"/>
+          </a:p>
+        </p:txBody>
       </p:sp>
       <p:sp>
         <p:nvSpPr>
@@ -2610,7 +2347,7 @@
           <a:bodyPr wrap="none" lIns="0" tIns="0" rIns="0" bIns="0" rtlCol="0" anchor="ctr"/>
           <a:lstStyle/>
           <a:p>
-            <a:pPr algn="ctr" indent="0" marL="0">
+            <a:pPr marL="0" indent="0" algn="ctr">
               <a:lnSpc>
                 <a:spcPct val="100000"/>
               </a:lnSpc>
@@ -2652,7 +2389,7 @@
           <a:bodyPr wrap="none" lIns="0" tIns="0" rIns="0" bIns="0" rtlCol="0" anchor="t"/>
           <a:lstStyle/>
           <a:p>
-            <a:pPr algn="l" indent="0" marL="0">
+            <a:pPr marL="0" indent="0" algn="l">
               <a:lnSpc>
                 <a:spcPct val="104000"/>
               </a:lnSpc>
@@ -2694,7 +2431,7 @@
           <a:bodyPr wrap="none" lIns="0" tIns="0" rIns="0" bIns="0" rtlCol="0" anchor="t"/>
           <a:lstStyle/>
           <a:p>
-            <a:pPr algn="l" indent="0" marL="0">
+            <a:pPr marL="0" indent="0" algn="l">
               <a:lnSpc>
                 <a:spcPct val="119000"/>
               </a:lnSpc>
@@ -2741,6 +2478,13 @@
             <a:prstDash val="solid"/>
           </a:ln>
         </p:spPr>
+        <p:txBody>
+          <a:bodyPr/>
+          <a:lstStyle/>
+          <a:p>
+            <a:endParaRPr lang="en-US"/>
+          </a:p>
+        </p:txBody>
       </p:sp>
       <p:sp>
         <p:nvSpPr>
@@ -2763,7 +2507,7 @@
           <a:bodyPr wrap="none" lIns="0" tIns="0" rIns="0" bIns="0" rtlCol="0" anchor="ctr"/>
           <a:lstStyle/>
           <a:p>
-            <a:pPr algn="ctr" indent="0" marL="0">
+            <a:pPr marL="0" indent="0" algn="ctr">
               <a:lnSpc>
                 <a:spcPct val="100000"/>
               </a:lnSpc>
@@ -2805,7 +2549,7 @@
           <a:bodyPr wrap="none" lIns="0" tIns="0" rIns="0" bIns="0" rtlCol="0" anchor="t"/>
           <a:lstStyle/>
           <a:p>
-            <a:pPr algn="l" indent="0" marL="0">
+            <a:pPr marL="0" indent="0" algn="l">
               <a:lnSpc>
                 <a:spcPct val="104000"/>
               </a:lnSpc>
@@ -2847,7 +2591,7 @@
           <a:bodyPr wrap="none" lIns="0" tIns="0" rIns="0" bIns="0" rtlCol="0" anchor="t"/>
           <a:lstStyle/>
           <a:p>
-            <a:pPr algn="l" indent="0" marL="0">
+            <a:pPr marL="0" indent="0" algn="l">
               <a:lnSpc>
                 <a:spcPct val="119000"/>
               </a:lnSpc>
@@ -2891,6 +2635,13 @@
           </a:solidFill>
           <a:ln/>
         </p:spPr>
+        <p:txBody>
+          <a:bodyPr/>
+          <a:lstStyle/>
+          <a:p>
+            <a:endParaRPr lang="en-US"/>
+          </a:p>
+        </p:txBody>
       </p:sp>
       <p:sp>
         <p:nvSpPr>
@@ -2913,7 +2664,7 @@
           <a:bodyPr wrap="none" lIns="0" tIns="0" rIns="0" bIns="0" rtlCol="0" anchor="t"/>
           <a:lstStyle/>
           <a:p>
-            <a:pPr algn="l" indent="0" marL="0">
+            <a:pPr marL="0" indent="0" algn="l">
               <a:lnSpc>
                 <a:spcPct val="104000"/>
               </a:lnSpc>
@@ -2957,7 +2708,7 @@
           </a:bodyPr>
           <a:lstStyle/>
           <a:p>
-            <a:pPr algn="l" indent="0" marL="0">
+            <a:pPr marL="0" indent="0" algn="l">
               <a:lnSpc>
                 <a:spcPct val="119000"/>
               </a:lnSpc>
@@ -3001,6 +2752,13 @@
           </a:solidFill>
           <a:ln/>
         </p:spPr>
+        <p:txBody>
+          <a:bodyPr/>
+          <a:lstStyle/>
+          <a:p>
+            <a:endParaRPr lang="en-US"/>
+          </a:p>
+        </p:txBody>
       </p:sp>
       <p:sp>
         <p:nvSpPr>
@@ -3023,7 +2781,7 @@
           <a:bodyPr wrap="none" lIns="0" tIns="0" rIns="0" bIns="0" rtlCol="0" anchor="t"/>
           <a:lstStyle/>
           <a:p>
-            <a:pPr algn="l" indent="0" marL="0">
+            <a:pPr marL="0" indent="0" algn="l">
               <a:lnSpc>
                 <a:spcPct val="104000"/>
               </a:lnSpc>
@@ -3067,7 +2825,7 @@
           </a:bodyPr>
           <a:lstStyle/>
           <a:p>
-            <a:pPr algn="l" marL="233680" indent="-233680">
+            <a:pPr marL="233680" indent="-233680" algn="l">
               <a:lnSpc>
                 <a:spcPct val="119000"/>
               </a:lnSpc>
@@ -3088,7 +2846,7 @@
             <a:endParaRPr lang="en-US" sz="1150" dirty="0"/>
           </a:p>
           <a:p>
-            <a:pPr algn="l" marL="233680" indent="-233680">
+            <a:pPr marL="233680" indent="-233680" algn="l">
               <a:lnSpc>
                 <a:spcPct val="119000"/>
               </a:lnSpc>
@@ -3109,7 +2867,7 @@
             <a:endParaRPr lang="en-US" sz="1150" dirty="0"/>
           </a:p>
           <a:p>
-            <a:pPr algn="l" marL="233680" indent="-233680">
+            <a:pPr marL="233680" indent="-233680" algn="l">
               <a:lnSpc>
                 <a:spcPct val="119000"/>
               </a:lnSpc>
@@ -3130,7 +2888,7 @@
             <a:endParaRPr lang="en-US" sz="1150" dirty="0"/>
           </a:p>
           <a:p>
-            <a:pPr algn="l" marL="233680" indent="-233680">
+            <a:pPr marL="233680" indent="-233680" algn="l">
               <a:lnSpc>
                 <a:spcPct val="119000"/>
               </a:lnSpc>
@@ -3198,7 +2956,7 @@
           <a:bodyPr wrap="none" lIns="0" tIns="0" rIns="0" bIns="0" rtlCol="0" anchor="t"/>
           <a:lstStyle/>
           <a:p>
-            <a:pPr algn="l" indent="0" marL="0">
+            <a:pPr marL="0" indent="0" algn="l">
               <a:lnSpc>
                 <a:spcPct val="104000"/>
               </a:lnSpc>
@@ -3240,7 +2998,7 @@
           <a:bodyPr wrap="none" lIns="0" tIns="0" rIns="0" bIns="0" rtlCol="0" anchor="t"/>
           <a:lstStyle/>
           <a:p>
-            <a:pPr algn="l" indent="0" marL="0">
+            <a:pPr marL="0" indent="0" algn="l">
               <a:lnSpc>
                 <a:spcPct val="104000"/>
               </a:lnSpc>
@@ -3263,17 +3021,17 @@
       </p:sp>
       <p:pic>
         <p:nvPicPr>
-          <p:cNvPr id="4" name="Image 0" descr="preencoded.png">    </p:cNvPr>
+          <p:cNvPr id="4" name="Image 0" descr="preencoded.png"/>
           <p:cNvPicPr>
             <a:picLocks noChangeAspect="1"/>
           </p:cNvPicPr>
           <p:nvPr/>
         </p:nvPicPr>
         <p:blipFill>
-          <a:blip r:embed="rId1">
+          <a:blip>
             <a:extLst>
               <a:ext uri="{96DAC541-7B7A-43D3-8B79-37D633B846F1}">
-                <asvg:svgBlip xmlns:asvg="http://schemas.microsoft.com/office/drawing/2016/SVG/main" r:embed="rId2"/>
+                <asvg:svgBlip xmlns:asvg="http://schemas.microsoft.com/office/drawing/2016/SVG/main" r:embed="rId3"/>
               </a:ext>
             </a:extLst>
           </a:blip>
@@ -3312,7 +3070,7 @@
           <a:bodyPr wrap="none" lIns="0" tIns="0" rIns="0" bIns="0" rtlCol="0" anchor="ctr"/>
           <a:lstStyle/>
           <a:p>
-            <a:pPr algn="ctr" indent="0" marL="0">
+            <a:pPr marL="0" indent="0" algn="ctr">
               <a:lnSpc>
                 <a:spcPct val="100000"/>
               </a:lnSpc>
@@ -3354,7 +3112,7 @@
           <a:bodyPr wrap="none" lIns="0" tIns="0" rIns="0" bIns="0" rtlCol="0" anchor="t"/>
           <a:lstStyle/>
           <a:p>
-            <a:pPr algn="l" indent="0" marL="0">
+            <a:pPr marL="0" indent="0" algn="l">
               <a:lnSpc>
                 <a:spcPct val="104000"/>
               </a:lnSpc>
@@ -3377,17 +3135,17 @@
       </p:sp>
       <p:pic>
         <p:nvPicPr>
-          <p:cNvPr id="7" name="Image 1" descr="preencoded.png">    </p:cNvPr>
+          <p:cNvPr id="7" name="Image 1" descr="preencoded.png"/>
           <p:cNvPicPr>
             <a:picLocks noChangeAspect="1"/>
           </p:cNvPicPr>
           <p:nvPr/>
         </p:nvPicPr>
         <p:blipFill>
-          <a:blip r:embed="rId3">
+          <a:blip>
             <a:extLst>
               <a:ext uri="{96DAC541-7B7A-43D3-8B79-37D633B846F1}">
-                <asvg:svgBlip xmlns:asvg="http://schemas.microsoft.com/office/drawing/2016/SVG/main" r:embed="rId4"/>
+                <asvg:svgBlip xmlns:asvg="http://schemas.microsoft.com/office/drawing/2016/SVG/main" r:embed="rId3"/>
               </a:ext>
             </a:extLst>
           </a:blip>
@@ -3426,7 +3184,7 @@
           <a:bodyPr wrap="none" lIns="0" tIns="0" rIns="0" bIns="0" rtlCol="0" anchor="ctr"/>
           <a:lstStyle/>
           <a:p>
-            <a:pPr algn="ctr" indent="0" marL="0">
+            <a:pPr marL="0" indent="0" algn="ctr">
               <a:lnSpc>
                 <a:spcPct val="100000"/>
               </a:lnSpc>
@@ -3468,7 +3226,7 @@
           <a:bodyPr wrap="none" lIns="0" tIns="0" rIns="0" bIns="0" rtlCol="0" anchor="t"/>
           <a:lstStyle/>
           <a:p>
-            <a:pPr algn="l" indent="0" marL="0">
+            <a:pPr marL="0" indent="0" algn="l">
               <a:lnSpc>
                 <a:spcPct val="104000"/>
               </a:lnSpc>
@@ -3491,17 +3249,17 @@
       </p:sp>
       <p:pic>
         <p:nvPicPr>
-          <p:cNvPr id="10" name="Image 2" descr="preencoded.png">    </p:cNvPr>
+          <p:cNvPr id="10" name="Image 2" descr="preencoded.png"/>
           <p:cNvPicPr>
             <a:picLocks noChangeAspect="1"/>
           </p:cNvPicPr>
           <p:nvPr/>
         </p:nvPicPr>
         <p:blipFill>
-          <a:blip r:embed="rId5">
+          <a:blip>
             <a:extLst>
               <a:ext uri="{96DAC541-7B7A-43D3-8B79-37D633B846F1}">
-                <asvg:svgBlip xmlns:asvg="http://schemas.microsoft.com/office/drawing/2016/SVG/main" r:embed="rId6"/>
+                <asvg:svgBlip xmlns:asvg="http://schemas.microsoft.com/office/drawing/2016/SVG/main" r:embed="rId3"/>
               </a:ext>
             </a:extLst>
           </a:blip>
@@ -3540,7 +3298,7 @@
           <a:bodyPr wrap="none" lIns="0" tIns="0" rIns="0" bIns="0" rtlCol="0" anchor="ctr"/>
           <a:lstStyle/>
           <a:p>
-            <a:pPr algn="ctr" indent="0" marL="0">
+            <a:pPr marL="0" indent="0" algn="ctr">
               <a:lnSpc>
                 <a:spcPct val="100000"/>
               </a:lnSpc>
@@ -3582,7 +3340,7 @@
           <a:bodyPr wrap="none" lIns="0" tIns="0" rIns="0" bIns="0" rtlCol="0" anchor="t"/>
           <a:lstStyle/>
           <a:p>
-            <a:pPr algn="l" indent="0" marL="0">
+            <a:pPr marL="0" indent="0" algn="l">
               <a:lnSpc>
                 <a:spcPct val="104000"/>
               </a:lnSpc>
@@ -3605,17 +3363,17 @@
       </p:sp>
       <p:pic>
         <p:nvPicPr>
-          <p:cNvPr id="13" name="Image 3" descr="preencoded.png">    </p:cNvPr>
+          <p:cNvPr id="13" name="Image 3" descr="preencoded.png"/>
           <p:cNvPicPr>
             <a:picLocks noChangeAspect="1"/>
           </p:cNvPicPr>
           <p:nvPr/>
         </p:nvPicPr>
         <p:blipFill>
-          <a:blip r:embed="rId7">
+          <a:blip>
             <a:extLst>
               <a:ext uri="{96DAC541-7B7A-43D3-8B79-37D633B846F1}">
-                <asvg:svgBlip xmlns:asvg="http://schemas.microsoft.com/office/drawing/2016/SVG/main" r:embed="rId8"/>
+                <asvg:svgBlip xmlns:asvg="http://schemas.microsoft.com/office/drawing/2016/SVG/main" r:embed="rId3"/>
               </a:ext>
             </a:extLst>
           </a:blip>
@@ -3654,7 +3412,7 @@
           <a:bodyPr wrap="none" lIns="0" tIns="0" rIns="0" bIns="0" rtlCol="0" anchor="ctr"/>
           <a:lstStyle/>
           <a:p>
-            <a:pPr algn="ctr" indent="0" marL="0">
+            <a:pPr marL="0" indent="0" algn="ctr">
               <a:lnSpc>
                 <a:spcPct val="100000"/>
               </a:lnSpc>
@@ -3696,7 +3454,7 @@
           <a:bodyPr wrap="none" lIns="0" tIns="0" rIns="0" bIns="0" rtlCol="0" anchor="t"/>
           <a:lstStyle/>
           <a:p>
-            <a:pPr algn="l" indent="0" marL="0">
+            <a:pPr marL="0" indent="0" algn="l">
               <a:lnSpc>
                 <a:spcPct val="104000"/>
               </a:lnSpc>
@@ -3719,17 +3477,17 @@
       </p:sp>
       <p:pic>
         <p:nvPicPr>
-          <p:cNvPr id="16" name="Image 4" descr="preencoded.png">    </p:cNvPr>
+          <p:cNvPr id="16" name="Image 4" descr="preencoded.png"/>
           <p:cNvPicPr>
             <a:picLocks noChangeAspect="1"/>
           </p:cNvPicPr>
           <p:nvPr/>
         </p:nvPicPr>
         <p:blipFill>
-          <a:blip r:embed="rId9">
+          <a:blip>
             <a:extLst>
               <a:ext uri="{96DAC541-7B7A-43D3-8B79-37D633B846F1}">
-                <asvg:svgBlip xmlns:asvg="http://schemas.microsoft.com/office/drawing/2016/SVG/main" r:embed="rId10"/>
+                <asvg:svgBlip xmlns:asvg="http://schemas.microsoft.com/office/drawing/2016/SVG/main" r:embed="rId3"/>
               </a:ext>
             </a:extLst>
           </a:blip>
@@ -3768,7 +3526,7 @@
           <a:bodyPr wrap="none" lIns="0" tIns="0" rIns="0" bIns="0" rtlCol="0" anchor="ctr"/>
           <a:lstStyle/>
           <a:p>
-            <a:pPr algn="ctr" indent="0" marL="0">
+            <a:pPr marL="0" indent="0" algn="ctr">
               <a:lnSpc>
                 <a:spcPct val="100000"/>
               </a:lnSpc>
@@ -3810,7 +3568,7 @@
           <a:bodyPr wrap="none" lIns="0" tIns="0" rIns="0" bIns="0" rtlCol="0" anchor="t"/>
           <a:lstStyle/>
           <a:p>
-            <a:pPr algn="l" indent="0" marL="0">
+            <a:pPr marL="0" indent="0" algn="l">
               <a:lnSpc>
                 <a:spcPct val="104000"/>
               </a:lnSpc>
@@ -3852,7 +3610,7 @@
           <a:bodyPr wrap="none" lIns="0" tIns="0" rIns="0" bIns="0" rtlCol="0" anchor="t"/>
           <a:lstStyle/>
           <a:p>
-            <a:pPr algn="l" indent="0" marL="0">
+            <a:pPr marL="0" indent="0" algn="l">
               <a:lnSpc>
                 <a:spcPct val="115000"/>
               </a:lnSpc>
@@ -3919,7 +3677,7 @@
           <a:bodyPr wrap="none" lIns="0" tIns="0" rIns="0" bIns="0" rtlCol="0" anchor="t"/>
           <a:lstStyle/>
           <a:p>
-            <a:pPr algn="l" indent="0" marL="0">
+            <a:pPr marL="0" indent="0" algn="l">
               <a:lnSpc>
                 <a:spcPct val="104000"/>
               </a:lnSpc>
@@ -3961,7 +3719,7 @@
           <a:bodyPr wrap="none" lIns="0" tIns="0" rIns="0" bIns="0" rtlCol="0" anchor="t"/>
           <a:lstStyle/>
           <a:p>
-            <a:pPr algn="l" indent="0" marL="0">
+            <a:pPr marL="0" indent="0" algn="l">
               <a:lnSpc>
                 <a:spcPct val="104000"/>
               </a:lnSpc>
@@ -4005,6 +3763,13 @@
           </a:solidFill>
           <a:ln/>
         </p:spPr>
+        <p:txBody>
+          <a:bodyPr/>
+          <a:lstStyle/>
+          <a:p>
+            <a:endParaRPr lang="en-US"/>
+          </a:p>
+        </p:txBody>
       </p:sp>
       <p:sp>
         <p:nvSpPr>
@@ -4027,7 +3792,7 @@
           <a:bodyPr wrap="none" lIns="0" tIns="0" rIns="0" bIns="0" rtlCol="0" anchor="t"/>
           <a:lstStyle/>
           <a:p>
-            <a:pPr algn="l" indent="0" marL="0">
+            <a:pPr marL="0" indent="0" algn="l">
               <a:lnSpc>
                 <a:spcPct val="104000"/>
               </a:lnSpc>
@@ -4071,7 +3836,7 @@
           </a:bodyPr>
           <a:lstStyle/>
           <a:p>
-            <a:pPr algn="l" marL="294640" indent="-294640">
+            <a:pPr marL="294640" indent="-294640" algn="l">
               <a:lnSpc>
                 <a:spcPct val="133000"/>
               </a:lnSpc>
@@ -4092,7 +3857,7 @@
             <a:endParaRPr lang="en-US" sz="1450" dirty="0"/>
           </a:p>
           <a:p>
-            <a:pPr algn="l" marL="294640" indent="-294640">
+            <a:pPr marL="294640" indent="-294640" algn="l">
               <a:lnSpc>
                 <a:spcPct val="133000"/>
               </a:lnSpc>
@@ -4113,7 +3878,7 @@
             <a:endParaRPr lang="en-US" sz="1450" dirty="0"/>
           </a:p>
           <a:p>
-            <a:pPr algn="l" marL="294640" indent="-294640">
+            <a:pPr marL="294640" indent="-294640" algn="l">
               <a:lnSpc>
                 <a:spcPct val="133000"/>
               </a:lnSpc>
@@ -4134,7 +3899,7 @@
             <a:endParaRPr lang="en-US" sz="1450" dirty="0"/>
           </a:p>
           <a:p>
-            <a:pPr algn="l" marL="294640" indent="-294640">
+            <a:pPr marL="294640" indent="-294640" algn="l">
               <a:lnSpc>
                 <a:spcPct val="133000"/>
               </a:lnSpc>
@@ -4177,7 +3942,7 @@
           <a:bodyPr wrap="none" lIns="0" tIns="0" rIns="0" bIns="0" rtlCol="0" anchor="t"/>
           <a:lstStyle/>
           <a:p>
-            <a:pPr algn="l" indent="0" marL="0">
+            <a:pPr marL="0" indent="0" algn="l">
               <a:lnSpc>
                 <a:spcPct val="104000"/>
               </a:lnSpc>
@@ -4221,7 +3986,7 @@
           </a:bodyPr>
           <a:lstStyle/>
           <a:p>
-            <a:pPr algn="l" marL="294640" indent="-294640">
+            <a:pPr marL="294640" indent="-294640" algn="l">
               <a:lnSpc>
                 <a:spcPct val="133000"/>
               </a:lnSpc>
@@ -4242,7 +4007,7 @@
             <a:endParaRPr lang="en-US" sz="1450" dirty="0"/>
           </a:p>
           <a:p>
-            <a:pPr algn="l" marL="294640" indent="-294640">
+            <a:pPr marL="294640" indent="-294640" algn="l">
               <a:lnSpc>
                 <a:spcPct val="133000"/>
               </a:lnSpc>
@@ -4263,7 +4028,7 @@
             <a:endParaRPr lang="en-US" sz="1450" dirty="0"/>
           </a:p>
           <a:p>
-            <a:pPr algn="l" marL="294640" indent="-294640">
+            <a:pPr marL="294640" indent="-294640" algn="l">
               <a:lnSpc>
                 <a:spcPct val="133000"/>
               </a:lnSpc>
@@ -4284,7 +4049,7 @@
             <a:endParaRPr lang="en-US" sz="1450" dirty="0"/>
           </a:p>
           <a:p>
-            <a:pPr algn="l" marL="294640" indent="-294640">
+            <a:pPr marL="294640" indent="-294640" algn="l">
               <a:lnSpc>
                 <a:spcPct val="133000"/>
               </a:lnSpc>
@@ -4329,7 +4094,7 @@
           </a:bodyPr>
           <a:lstStyle/>
           <a:p>
-            <a:pPr algn="l" indent="0" marL="0">
+            <a:pPr marL="0" indent="0" algn="l">
               <a:lnSpc>
                 <a:spcPct val="133000"/>
               </a:lnSpc>
@@ -4377,14 +4142,14 @@
       </p:grpSpPr>
       <p:pic>
         <p:nvPicPr>
-          <p:cNvPr id="2" name="Image 0" descr="preencoded.png">    </p:cNvPr>
+          <p:cNvPr id="2" name="Image 0" descr="preencoded.png"/>
           <p:cNvPicPr>
             <a:picLocks noChangeAspect="1"/>
           </p:cNvPicPr>
           <p:nvPr/>
         </p:nvPicPr>
         <p:blipFill>
-          <a:blip r:embed="rId1"/>
+          <a:blip r:embed="rId3"/>
           <a:stretch>
             <a:fillRect/>
           </a:stretch>
@@ -4420,7 +4185,7 @@
           <a:bodyPr wrap="none" lIns="0" tIns="0" rIns="0" bIns="0" rtlCol="0" anchor="t"/>
           <a:lstStyle/>
           <a:p>
-            <a:pPr algn="l" indent="0" marL="0">
+            <a:pPr marL="0" indent="0" algn="l">
               <a:lnSpc>
                 <a:spcPct val="104000"/>
               </a:lnSpc>
@@ -4462,7 +4227,7 @@
           <a:bodyPr wrap="none" lIns="0" tIns="0" rIns="0" bIns="0" rtlCol="0" anchor="t"/>
           <a:lstStyle/>
           <a:p>
-            <a:pPr algn="l" indent="0" marL="0">
+            <a:pPr marL="0" indent="0" algn="l">
               <a:lnSpc>
                 <a:spcPct val="104000"/>
               </a:lnSpc>
@@ -4504,7 +4269,7 @@
           <a:bodyPr wrap="none" lIns="0" tIns="0" rIns="0" bIns="0" rtlCol="0" anchor="t"/>
           <a:lstStyle/>
           <a:p>
-            <a:pPr algn="ctr" indent="0" marL="0">
+            <a:pPr marL="0" indent="0" algn="ctr">
               <a:lnSpc>
                 <a:spcPct val="83000"/>
               </a:lnSpc>
@@ -4546,7 +4311,7 @@
           <a:bodyPr wrap="none" lIns="0" tIns="0" rIns="0" bIns="0" rtlCol="0" anchor="t"/>
           <a:lstStyle/>
           <a:p>
-            <a:pPr algn="ctr" indent="0" marL="0">
+            <a:pPr marL="0" indent="0" algn="ctr">
               <a:lnSpc>
                 <a:spcPct val="104000"/>
               </a:lnSpc>
@@ -4588,7 +4353,7 @@
           <a:bodyPr wrap="none" lIns="0" tIns="0" rIns="0" bIns="0" rtlCol="0" anchor="t"/>
           <a:lstStyle/>
           <a:p>
-            <a:pPr algn="ctr" indent="0" marL="0">
+            <a:pPr marL="0" indent="0" algn="ctr">
               <a:lnSpc>
                 <a:spcPct val="83000"/>
               </a:lnSpc>
@@ -4630,7 +4395,7 @@
           <a:bodyPr wrap="none" lIns="0" tIns="0" rIns="0" bIns="0" rtlCol="0" anchor="t"/>
           <a:lstStyle/>
           <a:p>
-            <a:pPr algn="ctr" indent="0" marL="0">
+            <a:pPr marL="0" indent="0" algn="ctr">
               <a:lnSpc>
                 <a:spcPct val="104000"/>
               </a:lnSpc>
@@ -4672,7 +4437,7 @@
           <a:bodyPr wrap="none" lIns="0" tIns="0" rIns="0" bIns="0" rtlCol="0" anchor="t"/>
           <a:lstStyle/>
           <a:p>
-            <a:pPr algn="ctr" indent="0" marL="0">
+            <a:pPr marL="0" indent="0" algn="ctr">
               <a:lnSpc>
                 <a:spcPct val="83000"/>
               </a:lnSpc>
@@ -4714,7 +4479,7 @@
           <a:bodyPr wrap="none" lIns="0" tIns="0" rIns="0" bIns="0" rtlCol="0" anchor="t"/>
           <a:lstStyle/>
           <a:p>
-            <a:pPr algn="ctr" indent="0" marL="0">
+            <a:pPr marL="0" indent="0" algn="ctr">
               <a:lnSpc>
                 <a:spcPct val="104000"/>
               </a:lnSpc>
@@ -4756,7 +4521,7 @@
           <a:bodyPr wrap="none" lIns="0" tIns="0" rIns="0" bIns="0" rtlCol="0" anchor="t"/>
           <a:lstStyle/>
           <a:p>
-            <a:pPr algn="ctr" indent="0" marL="0">
+            <a:pPr marL="0" indent="0" algn="ctr">
               <a:lnSpc>
                 <a:spcPct val="115000"/>
               </a:lnSpc>
@@ -4798,7 +4563,7 @@
           <a:bodyPr wrap="none" lIns="0" tIns="0" rIns="0" bIns="0" rtlCol="0" anchor="t"/>
           <a:lstStyle/>
           <a:p>
-            <a:pPr algn="ctr" indent="0" marL="0">
+            <a:pPr marL="0" indent="0" algn="ctr">
               <a:lnSpc>
                 <a:spcPct val="83000"/>
               </a:lnSpc>
@@ -4840,7 +4605,7 @@
           <a:bodyPr wrap="none" lIns="0" tIns="0" rIns="0" bIns="0" rtlCol="0" anchor="t"/>
           <a:lstStyle/>
           <a:p>
-            <a:pPr algn="ctr" indent="0" marL="0">
+            <a:pPr marL="0" indent="0" algn="ctr">
               <a:lnSpc>
                 <a:spcPct val="104000"/>
               </a:lnSpc>
@@ -4882,7 +4647,7 @@
           <a:bodyPr wrap="none" lIns="0" tIns="0" rIns="0" bIns="0" rtlCol="0" anchor="t"/>
           <a:lstStyle/>
           <a:p>
-            <a:pPr algn="ctr" indent="0" marL="0">
+            <a:pPr marL="0" indent="0" algn="ctr">
               <a:lnSpc>
                 <a:spcPct val="115000"/>
               </a:lnSpc>
@@ -4924,7 +4689,7 @@
           <a:bodyPr wrap="none" lIns="0" tIns="0" rIns="0" bIns="0" rtlCol="0" anchor="t"/>
           <a:lstStyle/>
           <a:p>
-            <a:pPr algn="l" indent="0" marL="0">
+            <a:pPr marL="0" indent="0" algn="l">
               <a:lnSpc>
                 <a:spcPct val="115000"/>
               </a:lnSpc>
@@ -4991,7 +4756,7 @@
           <a:bodyPr wrap="none" lIns="0" tIns="0" rIns="0" bIns="0" rtlCol="0" anchor="t"/>
           <a:lstStyle/>
           <a:p>
-            <a:pPr algn="l" indent="0" marL="0">
+            <a:pPr marL="0" indent="0" algn="l">
               <a:lnSpc>
                 <a:spcPct val="104000"/>
               </a:lnSpc>
@@ -5033,7 +4798,7 @@
           <a:bodyPr wrap="none" lIns="0" tIns="0" rIns="0" bIns="0" rtlCol="0" anchor="t"/>
           <a:lstStyle/>
           <a:p>
-            <a:pPr algn="l" indent="0" marL="0">
+            <a:pPr marL="0" indent="0" algn="l">
               <a:lnSpc>
                 <a:spcPct val="104000"/>
               </a:lnSpc>
@@ -5056,14 +4821,14 @@
       </p:sp>
       <p:pic>
         <p:nvPicPr>
-          <p:cNvPr id="4" name="Image 0" descr="preencoded.png">    </p:cNvPr>
+          <p:cNvPr id="4" name="Image 0" descr="preencoded.png"/>
           <p:cNvPicPr>
             <a:picLocks noChangeAspect="1"/>
           </p:cNvPicPr>
           <p:nvPr/>
         </p:nvPicPr>
         <p:blipFill>
-          <a:blip r:embed="rId1"/>
+          <a:blip r:embed="rId3"/>
           <a:stretch>
             <a:fillRect/>
           </a:stretch>
@@ -5101,7 +4866,7 @@
           </a:bodyPr>
           <a:lstStyle/>
           <a:p>
-            <a:pPr algn="l" marL="264160" indent="-264160">
+            <a:pPr marL="264160" indent="-264160" algn="l">
               <a:lnSpc>
                 <a:spcPct val="127000"/>
               </a:lnSpc>
@@ -5122,7 +4887,7 @@
             <a:endParaRPr lang="en-US" sz="1300" dirty="0"/>
           </a:p>
           <a:p>
-            <a:pPr algn="l" marL="264160" indent="-264160">
+            <a:pPr marL="264160" indent="-264160" algn="l">
               <a:lnSpc>
                 <a:spcPct val="127000"/>
               </a:lnSpc>
@@ -5143,7 +4908,7 @@
             <a:endParaRPr lang="en-US" sz="1300" dirty="0"/>
           </a:p>
           <a:p>
-            <a:pPr algn="l" marL="264160" indent="-264160">
+            <a:pPr marL="264160" indent="-264160" algn="l">
               <a:lnSpc>
                 <a:spcPct val="127000"/>
               </a:lnSpc>
@@ -5164,7 +4929,7 @@
             <a:endParaRPr lang="en-US" sz="1300" dirty="0"/>
           </a:p>
           <a:p>
-            <a:pPr algn="l" marL="264160" indent="-264160">
+            <a:pPr marL="264160" indent="-264160" algn="l">
               <a:lnSpc>
                 <a:spcPct val="127000"/>
               </a:lnSpc>
@@ -5185,7 +4950,7 @@
             <a:endParaRPr lang="en-US" sz="1300" dirty="0"/>
           </a:p>
           <a:p>
-            <a:pPr algn="l" marL="264160" indent="-264160">
+            <a:pPr marL="264160" indent="-264160" algn="l">
               <a:lnSpc>
                 <a:spcPct val="127000"/>
               </a:lnSpc>
@@ -5228,7 +4993,7 @@
           <a:bodyPr wrap="none" lIns="0" tIns="0" rIns="0" bIns="0" rtlCol="0" anchor="t"/>
           <a:lstStyle/>
           <a:p>
-            <a:pPr algn="l" indent="0" marL="0">
+            <a:pPr marL="0" indent="0" algn="l">
               <a:lnSpc>
                 <a:spcPct val="127000"/>
               </a:lnSpc>
@@ -5295,7 +5060,7 @@
           <a:bodyPr wrap="none" lIns="0" tIns="0" rIns="0" bIns="0" rtlCol="0" anchor="t"/>
           <a:lstStyle/>
           <a:p>
-            <a:pPr algn="l" indent="0" marL="0">
+            <a:pPr marL="0" indent="0" algn="l">
               <a:lnSpc>
                 <a:spcPct val="104000"/>
               </a:lnSpc>
@@ -5337,7 +5102,7 @@
           <a:bodyPr wrap="none" lIns="0" tIns="0" rIns="0" bIns="0" rtlCol="0" anchor="t"/>
           <a:lstStyle/>
           <a:p>
-            <a:pPr algn="l" indent="0" marL="0">
+            <a:pPr marL="0" indent="0" algn="l">
               <a:lnSpc>
                 <a:spcPct val="104000"/>
               </a:lnSpc>
@@ -5360,17 +5125,17 @@
       </p:sp>
       <p:pic>
         <p:nvPicPr>
-          <p:cNvPr id="4" name="Image 0" descr="preencoded.png">    </p:cNvPr>
+          <p:cNvPr id="4" name="Image 0" descr="preencoded.png"/>
           <p:cNvPicPr>
             <a:picLocks noChangeAspect="1"/>
           </p:cNvPicPr>
           <p:nvPr/>
         </p:nvPicPr>
         <p:blipFill>
-          <a:blip r:embed="rId1">
+          <a:blip>
             <a:extLst>
               <a:ext uri="{96DAC541-7B7A-43D3-8B79-37D633B846F1}">
-                <asvg:svgBlip xmlns:asvg="http://schemas.microsoft.com/office/drawing/2016/SVG/main" r:embed="rId2"/>
+                <asvg:svgBlip xmlns:asvg="http://schemas.microsoft.com/office/drawing/2016/SVG/main" r:embed="rId3"/>
               </a:ext>
             </a:extLst>
           </a:blip>
@@ -5411,7 +5176,7 @@
           </a:bodyPr>
           <a:lstStyle/>
           <a:p>
-            <a:pPr algn="l" indent="0" marL="0">
+            <a:pPr marL="0" indent="0" algn="l">
               <a:lnSpc>
                 <a:spcPct val="104000"/>
               </a:lnSpc>
@@ -5434,14 +5199,88 @@
       </p:sp>
       <p:pic>
         <p:nvPicPr>
-          <p:cNvPr id="6" name="Image 1" descr="preencoded.png">    </p:cNvPr>
+          <p:cNvPr id="6" name="Image 1" descr="preencoded.png"/>
           <p:cNvPicPr>
             <a:picLocks noChangeAspect="1"/>
           </p:cNvPicPr>
           <p:nvPr/>
         </p:nvPicPr>
         <p:blipFill>
-          <a:blip r:embed="rId3">
+          <a:blip>
+            <a:extLst>
+              <a:ext uri="{96DAC541-7B7A-43D3-8B79-37D633B846F1}">
+                <asvg:svgBlip xmlns:asvg="http://schemas.microsoft.com/office/drawing/2016/SVG/main" r:embed="rId3"/>
+              </a:ext>
+            </a:extLst>
+          </a:blip>
+          <a:stretch>
+            <a:fillRect/>
+          </a:stretch>
+        </p:blipFill>
+        <p:spPr>
+          <a:xfrm>
+            <a:off x="6190301" y="2459732"/>
+            <a:ext cx="5339919" cy="1019373"/>
+          </a:xfrm>
+          <a:prstGeom prst="rect">
+            <a:avLst/>
+          </a:prstGeom>
+        </p:spPr>
+      </p:pic>
+      <p:sp>
+        <p:nvSpPr>
+          <p:cNvPr id="7" name="Text 3"/>
+          <p:cNvSpPr/>
+          <p:nvPr/>
+        </p:nvSpPr>
+        <p:spPr>
+          <a:xfrm>
+            <a:off x="6506305" y="2674144"/>
+            <a:ext cx="4809509" cy="590550"/>
+          </a:xfrm>
+          <a:prstGeom prst="rect">
+            <a:avLst/>
+          </a:prstGeom>
+          <a:noFill/>
+          <a:ln/>
+        </p:spPr>
+        <p:txBody>
+          <a:bodyPr wrap="square" lIns="0" tIns="0" rIns="0" bIns="0" rtlCol="0" anchor="t">
+            <a:normAutofit/>
+          </a:bodyPr>
+          <a:lstStyle/>
+          <a:p>
+            <a:pPr marL="0" indent="0" algn="l">
+              <a:lnSpc>
+                <a:spcPct val="104000"/>
+              </a:lnSpc>
+              <a:buNone/>
+            </a:pPr>
+            <a:r>
+              <a:rPr lang="en-US" sz="1850" dirty="0">
+                <a:solidFill>
+                  <a:srgbClr val="E5E0DF"/>
+                </a:solidFill>
+                <a:latin typeface="Saira Medium" pitchFamily="34" charset="0"/>
+                <a:ea typeface="Saira Medium" pitchFamily="34" charset="-122"/>
+                <a:cs typeface="Saira Medium" pitchFamily="34" charset="-120"/>
+              </a:rPr>
+              <a:t>Brent crude averaged ~USD 100/bbl after the Russia–Ukraine war</a:t>
+            </a:r>
+            <a:endParaRPr lang="en-US" sz="1850" dirty="0"/>
+          </a:p>
+        </p:txBody>
+      </p:sp>
+      <p:pic>
+        <p:nvPicPr>
+          <p:cNvPr id="8" name="Image 2" descr="preencoded.png"/>
+          <p:cNvPicPr>
+            <a:picLocks noChangeAspect="1"/>
+          </p:cNvPicPr>
+          <p:nvPr/>
+        </p:nvPicPr>
+        <p:blipFill>
+          <a:blip>
             <a:extLst>
               <a:ext uri="{96DAC541-7B7A-43D3-8B79-37D633B846F1}">
                 <asvg:svgBlip xmlns:asvg="http://schemas.microsoft.com/office/drawing/2016/SVG/main" r:embed="rId4"/>
@@ -5454,8 +5293,8 @@
         </p:blipFill>
         <p:spPr>
           <a:xfrm>
-            <a:off x="6190301" y="2459732"/>
-            <a:ext cx="5339919" cy="1019373"/>
+            <a:off x="661475" y="3668117"/>
+            <a:ext cx="5339820" cy="724098"/>
           </a:xfrm>
           <a:prstGeom prst="rect">
             <a:avLst/>
@@ -5464,28 +5303,26 @@
       </p:pic>
       <p:sp>
         <p:nvSpPr>
-          <p:cNvPr id="7" name="Text 3"/>
-          <p:cNvSpPr/>
-          <p:nvPr/>
-        </p:nvSpPr>
-        <p:spPr>
-          <a:xfrm>
-            <a:off x="6506305" y="2674144"/>
-            <a:ext cx="4809509" cy="590550"/>
-          </a:xfrm>
-          <a:prstGeom prst="rect">
-            <a:avLst/>
-          </a:prstGeom>
-          <a:noFill/>
-          <a:ln/>
-        </p:spPr>
-        <p:txBody>
-          <a:bodyPr wrap="square" lIns="0" tIns="0" rIns="0" bIns="0" rtlCol="0" anchor="t">
-            <a:normAutofit/>
-          </a:bodyPr>
-          <a:lstStyle/>
-          <a:p>
-            <a:pPr algn="l" indent="0" marL="0">
+          <p:cNvPr id="9" name="Text 4"/>
+          <p:cNvSpPr/>
+          <p:nvPr/>
+        </p:nvSpPr>
+        <p:spPr>
+          <a:xfrm>
+            <a:off x="977479" y="3882529"/>
+            <a:ext cx="4809409" cy="295275"/>
+          </a:xfrm>
+          <a:prstGeom prst="rect">
+            <a:avLst/>
+          </a:prstGeom>
+          <a:noFill/>
+          <a:ln/>
+        </p:spPr>
+        <p:txBody>
+          <a:bodyPr wrap="none" lIns="0" tIns="0" rIns="0" bIns="0" rtlCol="0" anchor="t"/>
+          <a:lstStyle/>
+          <a:p>
+            <a:pPr marL="0" indent="0" algn="l">
               <a:lnSpc>
                 <a:spcPct val="104000"/>
               </a:lnSpc>
@@ -5500,7 +5337,7 @@
                 <a:ea typeface="Saira Medium" pitchFamily="34" charset="-122"/>
                 <a:cs typeface="Saira Medium" pitchFamily="34" charset="-120"/>
               </a:rPr>
-              <a:t>Brent crude averaged ~USD 100/bbl after the Russia–Ukraine war</a:t>
+              <a:t>Edible oil and fertiliser imports repriced</a:t>
             </a:r>
             <a:endParaRPr lang="en-US" sz="1850" dirty="0"/>
           </a:p>
@@ -5508,17 +5345,17 @@
       </p:sp>
       <p:pic>
         <p:nvPicPr>
-          <p:cNvPr id="8" name="Image 2" descr="preencoded.png">    </p:cNvPr>
+          <p:cNvPr id="10" name="Image 3" descr="preencoded.png"/>
           <p:cNvPicPr>
             <a:picLocks noChangeAspect="1"/>
           </p:cNvPicPr>
           <p:nvPr/>
         </p:nvPicPr>
         <p:blipFill>
-          <a:blip r:embed="rId5">
+          <a:blip>
             <a:extLst>
               <a:ext uri="{96DAC541-7B7A-43D3-8B79-37D633B846F1}">
-                <asvg:svgBlip xmlns:asvg="http://schemas.microsoft.com/office/drawing/2016/SVG/main" r:embed="rId6"/>
+                <asvg:svgBlip xmlns:asvg="http://schemas.microsoft.com/office/drawing/2016/SVG/main" r:embed="rId4"/>
               </a:ext>
             </a:extLst>
           </a:blip>
@@ -5528,8 +5365,8 @@
         </p:blipFill>
         <p:spPr>
           <a:xfrm>
-            <a:off x="661475" y="3668117"/>
-            <a:ext cx="5339820" cy="724098"/>
+            <a:off x="6190301" y="3668117"/>
+            <a:ext cx="5339919" cy="724098"/>
           </a:xfrm>
           <a:prstGeom prst="rect">
             <a:avLst/>
@@ -5538,26 +5375,26 @@
       </p:pic>
       <p:sp>
         <p:nvSpPr>
-          <p:cNvPr id="9" name="Text 4"/>
-          <p:cNvSpPr/>
-          <p:nvPr/>
-        </p:nvSpPr>
-        <p:spPr>
-          <a:xfrm>
-            <a:off x="977479" y="3882529"/>
-            <a:ext cx="4809409" cy="295275"/>
-          </a:xfrm>
-          <a:prstGeom prst="rect">
-            <a:avLst/>
-          </a:prstGeom>
-          <a:noFill/>
-          <a:ln/>
-        </p:spPr>
-        <p:txBody>
-          <a:bodyPr wrap="none" lIns="0" tIns="0" rIns="0" bIns="0" rtlCol="0" anchor="t"/>
-          <a:lstStyle/>
-          <a:p>
-            <a:pPr algn="l" indent="0" marL="0">
+          <p:cNvPr id="11" name="Text 5"/>
+          <p:cNvSpPr/>
+          <p:nvPr/>
+        </p:nvSpPr>
+        <p:spPr>
+          <a:xfrm>
+            <a:off x="6506305" y="3882529"/>
+            <a:ext cx="4809509" cy="295275"/>
+          </a:xfrm>
+          <a:prstGeom prst="rect">
+            <a:avLst/>
+          </a:prstGeom>
+          <a:noFill/>
+          <a:ln/>
+        </p:spPr>
+        <p:txBody>
+          <a:bodyPr wrap="none" lIns="0" tIns="0" rIns="0" bIns="0" rtlCol="0" anchor="t"/>
+          <a:lstStyle/>
+          <a:p>
+            <a:pPr marL="0" indent="0" algn="l">
               <a:lnSpc>
                 <a:spcPct val="104000"/>
               </a:lnSpc>
@@ -5572,7 +5409,7 @@
                 <a:ea typeface="Saira Medium" pitchFamily="34" charset="-122"/>
                 <a:cs typeface="Saira Medium" pitchFamily="34" charset="-120"/>
               </a:rPr>
-              <a:t>Edible oil and fertiliser imports repriced</a:t>
+              <a:t>March heatwave cut wheat output</a:t>
             </a:r>
             <a:endParaRPr lang="en-US" sz="1850" dirty="0"/>
           </a:p>
@@ -5580,17 +5417,17 @@
       </p:sp>
       <p:pic>
         <p:nvPicPr>
-          <p:cNvPr id="10" name="Image 3" descr="preencoded.png">    </p:cNvPr>
+          <p:cNvPr id="12" name="Image 4" descr="preencoded.png"/>
           <p:cNvPicPr>
             <a:picLocks noChangeAspect="1"/>
           </p:cNvPicPr>
           <p:nvPr/>
         </p:nvPicPr>
         <p:blipFill>
-          <a:blip r:embed="rId7">
+          <a:blip>
             <a:extLst>
               <a:ext uri="{96DAC541-7B7A-43D3-8B79-37D633B846F1}">
-                <asvg:svgBlip xmlns:asvg="http://schemas.microsoft.com/office/drawing/2016/SVG/main" r:embed="rId8"/>
+                <asvg:svgBlip xmlns:asvg="http://schemas.microsoft.com/office/drawing/2016/SVG/main" r:embed="rId4"/>
               </a:ext>
             </a:extLst>
           </a:blip>
@@ -5600,8 +5437,8 @@
         </p:blipFill>
         <p:spPr>
           <a:xfrm>
-            <a:off x="6190301" y="3668117"/>
-            <a:ext cx="5339919" cy="724098"/>
+            <a:off x="661475" y="4581227"/>
+            <a:ext cx="5339820" cy="724098"/>
           </a:xfrm>
           <a:prstGeom prst="rect">
             <a:avLst/>
@@ -5610,26 +5447,26 @@
       </p:pic>
       <p:sp>
         <p:nvSpPr>
-          <p:cNvPr id="11" name="Text 5"/>
-          <p:cNvSpPr/>
-          <p:nvPr/>
-        </p:nvSpPr>
-        <p:spPr>
-          <a:xfrm>
-            <a:off x="6506305" y="3882529"/>
-            <a:ext cx="4809509" cy="295275"/>
-          </a:xfrm>
-          <a:prstGeom prst="rect">
-            <a:avLst/>
-          </a:prstGeom>
-          <a:noFill/>
-          <a:ln/>
-        </p:spPr>
-        <p:txBody>
-          <a:bodyPr wrap="none" lIns="0" tIns="0" rIns="0" bIns="0" rtlCol="0" anchor="t"/>
-          <a:lstStyle/>
-          <a:p>
-            <a:pPr algn="l" indent="0" marL="0">
+          <p:cNvPr id="13" name="Text 6"/>
+          <p:cNvSpPr/>
+          <p:nvPr/>
+        </p:nvSpPr>
+        <p:spPr>
+          <a:xfrm>
+            <a:off x="977479" y="4795639"/>
+            <a:ext cx="4809409" cy="295275"/>
+          </a:xfrm>
+          <a:prstGeom prst="rect">
+            <a:avLst/>
+          </a:prstGeom>
+          <a:noFill/>
+          <a:ln/>
+        </p:spPr>
+        <p:txBody>
+          <a:bodyPr wrap="none" lIns="0" tIns="0" rIns="0" bIns="0" rtlCol="0" anchor="t"/>
+          <a:lstStyle/>
+          <a:p>
+            <a:pPr marL="0" indent="0" algn="l">
               <a:lnSpc>
                 <a:spcPct val="104000"/>
               </a:lnSpc>
@@ -5644,7 +5481,7 @@
                 <a:ea typeface="Saira Medium" pitchFamily="34" charset="-122"/>
                 <a:cs typeface="Saira Medium" pitchFamily="34" charset="-120"/>
               </a:rPr>
-              <a:t>March heatwave cut wheat output</a:t>
+              <a:t>Weak rupee amplified every imported input</a:t>
             </a:r>
             <a:endParaRPr lang="en-US" sz="1850" dirty="0"/>
           </a:p>
@@ -5652,17 +5489,17 @@
       </p:sp>
       <p:pic>
         <p:nvPicPr>
-          <p:cNvPr id="12" name="Image 4" descr="preencoded.png">    </p:cNvPr>
+          <p:cNvPr id="14" name="Image 5" descr="preencoded.png"/>
           <p:cNvPicPr>
             <a:picLocks noChangeAspect="1"/>
           </p:cNvPicPr>
           <p:nvPr/>
         </p:nvPicPr>
         <p:blipFill>
-          <a:blip r:embed="rId9">
+          <a:blip>
             <a:extLst>
               <a:ext uri="{96DAC541-7B7A-43D3-8B79-37D633B846F1}">
-                <asvg:svgBlip xmlns:asvg="http://schemas.microsoft.com/office/drawing/2016/SVG/main" r:embed="rId10"/>
+                <asvg:svgBlip xmlns:asvg="http://schemas.microsoft.com/office/drawing/2016/SVG/main" r:embed="rId4"/>
               </a:ext>
             </a:extLst>
           </a:blip>
@@ -5672,8 +5509,8 @@
         </p:blipFill>
         <p:spPr>
           <a:xfrm>
-            <a:off x="661475" y="4581227"/>
-            <a:ext cx="5339820" cy="724098"/>
+            <a:off x="6190301" y="4581227"/>
+            <a:ext cx="5339919" cy="724098"/>
           </a:xfrm>
           <a:prstGeom prst="rect">
             <a:avLst/>
@@ -5682,26 +5519,26 @@
       </p:pic>
       <p:sp>
         <p:nvSpPr>
-          <p:cNvPr id="13" name="Text 6"/>
-          <p:cNvSpPr/>
-          <p:nvPr/>
-        </p:nvSpPr>
-        <p:spPr>
-          <a:xfrm>
-            <a:off x="977479" y="4795639"/>
-            <a:ext cx="4809409" cy="295275"/>
-          </a:xfrm>
-          <a:prstGeom prst="rect">
-            <a:avLst/>
-          </a:prstGeom>
-          <a:noFill/>
-          <a:ln/>
-        </p:spPr>
-        <p:txBody>
-          <a:bodyPr wrap="none" lIns="0" tIns="0" rIns="0" bIns="0" rtlCol="0" anchor="t"/>
-          <a:lstStyle/>
-          <a:p>
-            <a:pPr algn="l" indent="0" marL="0">
+          <p:cNvPr id="15" name="Text 7"/>
+          <p:cNvSpPr/>
+          <p:nvPr/>
+        </p:nvSpPr>
+        <p:spPr>
+          <a:xfrm>
+            <a:off x="6506305" y="4795639"/>
+            <a:ext cx="4809509" cy="295275"/>
+          </a:xfrm>
+          <a:prstGeom prst="rect">
+            <a:avLst/>
+          </a:prstGeom>
+          <a:noFill/>
+          <a:ln/>
+        </p:spPr>
+        <p:txBody>
+          <a:bodyPr wrap="none" lIns="0" tIns="0" rIns="0" bIns="0" rtlCol="0" anchor="t"/>
+          <a:lstStyle/>
+          <a:p>
+            <a:pPr marL="0" indent="0" algn="l">
               <a:lnSpc>
                 <a:spcPct val="104000"/>
               </a:lnSpc>
@@ -5716,78 +5553,6 @@
                 <a:ea typeface="Saira Medium" pitchFamily="34" charset="-122"/>
                 <a:cs typeface="Saira Medium" pitchFamily="34" charset="-120"/>
               </a:rPr>
-              <a:t>Weak rupee amplified every imported input</a:t>
-            </a:r>
-            <a:endParaRPr lang="en-US" sz="1850" dirty="0"/>
-          </a:p>
-        </p:txBody>
-      </p:sp>
-      <p:pic>
-        <p:nvPicPr>
-          <p:cNvPr id="14" name="Image 5" descr="preencoded.png">    </p:cNvPr>
-          <p:cNvPicPr>
-            <a:picLocks noChangeAspect="1"/>
-          </p:cNvPicPr>
-          <p:nvPr/>
-        </p:nvPicPr>
-        <p:blipFill>
-          <a:blip r:embed="rId11">
-            <a:extLst>
-              <a:ext uri="{96DAC541-7B7A-43D3-8B79-37D633B846F1}">
-                <asvg:svgBlip xmlns:asvg="http://schemas.microsoft.com/office/drawing/2016/SVG/main" r:embed="rId12"/>
-              </a:ext>
-            </a:extLst>
-          </a:blip>
-          <a:stretch>
-            <a:fillRect/>
-          </a:stretch>
-        </p:blipFill>
-        <p:spPr>
-          <a:xfrm>
-            <a:off x="6190301" y="4581227"/>
-            <a:ext cx="5339919" cy="724098"/>
-          </a:xfrm>
-          <a:prstGeom prst="rect">
-            <a:avLst/>
-          </a:prstGeom>
-        </p:spPr>
-      </p:pic>
-      <p:sp>
-        <p:nvSpPr>
-          <p:cNvPr id="15" name="Text 7"/>
-          <p:cNvSpPr/>
-          <p:nvPr/>
-        </p:nvSpPr>
-        <p:spPr>
-          <a:xfrm>
-            <a:off x="6506305" y="4795639"/>
-            <a:ext cx="4809509" cy="295275"/>
-          </a:xfrm>
-          <a:prstGeom prst="rect">
-            <a:avLst/>
-          </a:prstGeom>
-          <a:noFill/>
-          <a:ln/>
-        </p:spPr>
-        <p:txBody>
-          <a:bodyPr wrap="none" lIns="0" tIns="0" rIns="0" bIns="0" rtlCol="0" anchor="t"/>
-          <a:lstStyle/>
-          <a:p>
-            <a:pPr algn="l" indent="0" marL="0">
-              <a:lnSpc>
-                <a:spcPct val="104000"/>
-              </a:lnSpc>
-              <a:buNone/>
-            </a:pPr>
-            <a:r>
-              <a:rPr lang="en-US" sz="1850" dirty="0">
-                <a:solidFill>
-                  <a:srgbClr val="E5E0DF"/>
-                </a:solidFill>
-                <a:latin typeface="Saira Medium" pitchFamily="34" charset="0"/>
-                <a:ea typeface="Saira Medium" pitchFamily="34" charset="-122"/>
-                <a:cs typeface="Saira Medium" pitchFamily="34" charset="-120"/>
-              </a:rPr>
               <a:t>RBI response: 225 bps of repo hikes</a:t>
             </a:r>
             <a:endParaRPr lang="en-US" sz="1850" dirty="0"/>
@@ -5815,7 +5580,7 @@
           <a:bodyPr wrap="none" lIns="0" tIns="0" rIns="0" bIns="0" rtlCol="0" anchor="t"/>
           <a:lstStyle/>
           <a:p>
-            <a:pPr algn="l" indent="0" marL="0">
+            <a:pPr marL="0" indent="0" algn="l">
               <a:lnSpc>
                 <a:spcPct val="133000"/>
               </a:lnSpc>
@@ -5882,7 +5647,7 @@
           <a:bodyPr wrap="none" lIns="0" tIns="0" rIns="0" bIns="0" rtlCol="0" anchor="t"/>
           <a:lstStyle/>
           <a:p>
-            <a:pPr algn="l" indent="0" marL="0">
+            <a:pPr marL="0" indent="0" algn="l">
               <a:lnSpc>
                 <a:spcPct val="104000"/>
               </a:lnSpc>
@@ -5924,7 +5689,7 @@
           <a:bodyPr wrap="none" lIns="0" tIns="0" rIns="0" bIns="0" rtlCol="0" anchor="t"/>
           <a:lstStyle/>
           <a:p>
-            <a:pPr algn="l" indent="0" marL="0">
+            <a:pPr marL="0" indent="0" algn="l">
               <a:lnSpc>
                 <a:spcPct val="104000"/>
               </a:lnSpc>
@@ -5968,6 +5733,13 @@
           </a:solidFill>
           <a:ln/>
         </p:spPr>
+        <p:txBody>
+          <a:bodyPr/>
+          <a:lstStyle/>
+          <a:p>
+            <a:endParaRPr lang="en-US"/>
+          </a:p>
+        </p:txBody>
       </p:sp>
       <p:sp>
         <p:nvSpPr>
@@ -5990,7 +5762,7 @@
           <a:bodyPr wrap="none" lIns="0" tIns="0" rIns="0" bIns="0" rtlCol="0" anchor="t"/>
           <a:lstStyle/>
           <a:p>
-            <a:pPr algn="l" indent="0" marL="0">
+            <a:pPr marL="0" indent="0" algn="l">
               <a:lnSpc>
                 <a:spcPct val="104000"/>
               </a:lnSpc>
@@ -6034,7 +5806,7 @@
           </a:bodyPr>
           <a:lstStyle/>
           <a:p>
-            <a:pPr algn="l" marL="264160" indent="-264160">
+            <a:pPr marL="264160" indent="-264160" algn="l">
               <a:lnSpc>
                 <a:spcPct val="125000"/>
               </a:lnSpc>
@@ -6052,13 +5824,6 @@
               </a:rPr>
               <a:t>Food bucket 173.82 → 179.14 = </a:t>
             </a:r>
-            <a:pPr algn="l" marL="264160" indent="-264160">
-              <a:lnSpc>
-                <a:spcPct val="125000"/>
-              </a:lnSpc>
-              <a:buSzPct val="100000"/>
-              <a:buChar char="•"/>
-            </a:pPr>
             <a:r>
               <a:rPr lang="en-US" sz="1300" b="1" dirty="0">
                 <a:solidFill>
@@ -6073,7 +5838,7 @@
             <a:endParaRPr lang="en-US" sz="1300" dirty="0"/>
           </a:p>
           <a:p>
-            <a:pPr algn="l" marL="264160" indent="-264160">
+            <a:pPr marL="264160" indent="-264160" algn="l">
               <a:lnSpc>
                 <a:spcPct val="125000"/>
               </a:lnSpc>
@@ -6091,13 +5856,6 @@
               </a:rPr>
               <a:t>Highest MoM: </a:t>
             </a:r>
-            <a:pPr algn="l" marL="264160" indent="-264160">
-              <a:lnSpc>
-                <a:spcPct val="125000"/>
-              </a:lnSpc>
-              <a:buSzPct val="100000"/>
-              <a:buChar char="•"/>
-            </a:pPr>
             <a:r>
               <a:rPr lang="en-US" sz="1300" b="1" dirty="0">
                 <a:solidFill>
@@ -6112,7 +5870,7 @@
             <a:endParaRPr lang="en-US" sz="1300" dirty="0"/>
           </a:p>
           <a:p>
-            <a:pPr algn="l" marL="264160" indent="-264160">
+            <a:pPr marL="264160" indent="-264160" algn="l">
               <a:lnSpc>
                 <a:spcPct val="125000"/>
               </a:lnSpc>
@@ -6130,13 +5888,6 @@
               </a:rPr>
               <a:t>Lowest MoM: </a:t>
             </a:r>
-            <a:pPr algn="l" marL="264160" indent="-264160">
-              <a:lnSpc>
-                <a:spcPct val="125000"/>
-              </a:lnSpc>
-              <a:buSzPct val="100000"/>
-              <a:buChar char="•"/>
-            </a:pPr>
             <a:r>
               <a:rPr lang="en-US" sz="1300" b="1" dirty="0">
                 <a:solidFill>
@@ -6151,7 +5902,7 @@
             <a:endParaRPr lang="en-US" sz="1300" dirty="0"/>
           </a:p>
           <a:p>
-            <a:pPr algn="l" marL="264160" indent="-264160">
+            <a:pPr marL="264160" indent="-264160" algn="l">
               <a:lnSpc>
                 <a:spcPct val="125000"/>
               </a:lnSpc>
@@ -6169,13 +5920,6 @@
               </a:rPr>
               <a:t>Biggest driver: </a:t>
             </a:r>
-            <a:pPr algn="l" marL="264160" indent="-264160">
-              <a:lnSpc>
-                <a:spcPct val="125000"/>
-              </a:lnSpc>
-              <a:buSzPct val="100000"/>
-              <a:buChar char="•"/>
-            </a:pPr>
             <a:r>
               <a:rPr lang="en-US" sz="1300" b="1" dirty="0">
                 <a:solidFill>
@@ -6190,7 +5934,7 @@
             <a:endParaRPr lang="en-US" sz="1300" dirty="0"/>
           </a:p>
           <a:p>
-            <a:pPr algn="l" marL="264160" indent="-264160">
+            <a:pPr marL="264160" indent="-264160" algn="l">
               <a:lnSpc>
                 <a:spcPct val="125000"/>
               </a:lnSpc>
@@ -6214,14 +5958,14 @@
       </p:sp>
       <p:pic>
         <p:nvPicPr>
-          <p:cNvPr id="7" name="Image 0" descr="preencoded.png">    </p:cNvPr>
+          <p:cNvPr id="7" name="Image 0" descr="preencoded.png"/>
           <p:cNvPicPr>
             <a:picLocks noChangeAspect="1"/>
           </p:cNvPicPr>
           <p:nvPr/>
         </p:nvPicPr>
         <p:blipFill>
-          <a:blip r:embed="rId1"/>
+          <a:blip r:embed="rId3"/>
           <a:stretch>
             <a:fillRect/>
           </a:stretch>
@@ -6257,7 +6001,7 @@
           <a:bodyPr wrap="none" lIns="0" tIns="0" rIns="0" bIns="0" rtlCol="0" anchor="t"/>
           <a:lstStyle/>
           <a:p>
-            <a:pPr algn="l" indent="0" marL="0">
+            <a:pPr marL="0" indent="0" algn="l">
               <a:lnSpc>
                 <a:spcPct val="125000"/>
               </a:lnSpc>
@@ -6324,7 +6068,7 @@
           <a:bodyPr wrap="none" lIns="0" tIns="0" rIns="0" bIns="0" rtlCol="0" anchor="t"/>
           <a:lstStyle/>
           <a:p>
-            <a:pPr algn="l" indent="0" marL="0">
+            <a:pPr marL="0" indent="0" algn="l">
               <a:lnSpc>
                 <a:spcPct val="104000"/>
               </a:lnSpc>
@@ -6366,7 +6110,7 @@
           <a:bodyPr wrap="none" lIns="0" tIns="0" rIns="0" bIns="0" rtlCol="0" anchor="t"/>
           <a:lstStyle/>
           <a:p>
-            <a:pPr algn="l" indent="0" marL="0">
+            <a:pPr marL="0" indent="0" algn="l">
               <a:lnSpc>
                 <a:spcPct val="104000"/>
               </a:lnSpc>
@@ -6413,6 +6157,13 @@
             <a:prstDash val="solid"/>
           </a:ln>
         </p:spPr>
+        <p:txBody>
+          <a:bodyPr/>
+          <a:lstStyle/>
+          <a:p>
+            <a:endParaRPr lang="en-US"/>
+          </a:p>
+        </p:txBody>
       </p:sp>
       <p:sp>
         <p:nvSpPr>
@@ -6435,6 +6186,13 @@
           </a:solidFill>
           <a:ln/>
         </p:spPr>
+        <p:txBody>
+          <a:bodyPr/>
+          <a:lstStyle/>
+          <a:p>
+            <a:endParaRPr lang="en-US"/>
+          </a:p>
+        </p:txBody>
       </p:sp>
       <p:sp>
         <p:nvSpPr>
@@ -6457,6 +6215,13 @@
           </a:solidFill>
           <a:ln/>
         </p:spPr>
+        <p:txBody>
+          <a:bodyPr/>
+          <a:lstStyle/>
+          <a:p>
+            <a:endParaRPr lang="en-US"/>
+          </a:p>
+        </p:txBody>
       </p:sp>
       <p:sp>
         <p:nvSpPr>
@@ -6479,6 +6244,13 @@
           </a:solidFill>
           <a:ln/>
         </p:spPr>
+        <p:txBody>
+          <a:bodyPr/>
+          <a:lstStyle/>
+          <a:p>
+            <a:endParaRPr lang="en-US"/>
+          </a:p>
+        </p:txBody>
       </p:sp>
       <p:sp>
         <p:nvSpPr>
@@ -6501,6 +6273,13 @@
           </a:solidFill>
           <a:ln/>
         </p:spPr>
+        <p:txBody>
+          <a:bodyPr/>
+          <a:lstStyle/>
+          <a:p>
+            <a:endParaRPr lang="en-US"/>
+          </a:p>
+        </p:txBody>
       </p:sp>
       <p:sp>
         <p:nvSpPr>
@@ -6523,6 +6302,13 @@
           </a:solidFill>
           <a:ln/>
         </p:spPr>
+        <p:txBody>
+          <a:bodyPr/>
+          <a:lstStyle/>
+          <a:p>
+            <a:endParaRPr lang="en-US"/>
+          </a:p>
+        </p:txBody>
       </p:sp>
       <p:sp>
         <p:nvSpPr>
@@ -6545,6 +6331,13 @@
           </a:solidFill>
           <a:ln/>
         </p:spPr>
+        <p:txBody>
+          <a:bodyPr/>
+          <a:lstStyle/>
+          <a:p>
+            <a:endParaRPr lang="en-US"/>
+          </a:p>
+        </p:txBody>
       </p:sp>
       <p:sp>
         <p:nvSpPr>
@@ -6567,7 +6360,7 @@
           <a:bodyPr wrap="none" lIns="0" tIns="0" rIns="0" bIns="0" rtlCol="0" anchor="t"/>
           <a:lstStyle/>
           <a:p>
-            <a:pPr algn="l" indent="0" marL="0">
+            <a:pPr marL="0" indent="0" algn="l">
               <a:lnSpc>
                 <a:spcPct val="133000"/>
               </a:lnSpc>
@@ -6609,7 +6402,7 @@
           <a:bodyPr wrap="none" lIns="0" tIns="0" rIns="0" bIns="0" rtlCol="0" anchor="t"/>
           <a:lstStyle/>
           <a:p>
-            <a:pPr algn="l" indent="0" marL="0">
+            <a:pPr marL="0" indent="0" algn="l">
               <a:lnSpc>
                 <a:spcPct val="133000"/>
               </a:lnSpc>
@@ -6651,7 +6444,7 @@
           <a:bodyPr wrap="none" lIns="0" tIns="0" rIns="0" bIns="0" rtlCol="0" anchor="t"/>
           <a:lstStyle/>
           <a:p>
-            <a:pPr algn="l" indent="0" marL="0">
+            <a:pPr marL="0" indent="0" algn="l">
               <a:lnSpc>
                 <a:spcPct val="133000"/>
               </a:lnSpc>
@@ -6693,7 +6486,7 @@
           <a:bodyPr wrap="none" lIns="0" tIns="0" rIns="0" bIns="0" rtlCol="0" anchor="t"/>
           <a:lstStyle/>
           <a:p>
-            <a:pPr algn="l" indent="0" marL="0">
+            <a:pPr marL="0" indent="0" algn="l">
               <a:lnSpc>
                 <a:spcPct val="133000"/>
               </a:lnSpc>
@@ -6735,7 +6528,7 @@
           <a:bodyPr wrap="none" lIns="0" tIns="0" rIns="0" bIns="0" rtlCol="0" anchor="t"/>
           <a:lstStyle/>
           <a:p>
-            <a:pPr algn="l" indent="0" marL="0">
+            <a:pPr marL="0" indent="0" algn="l">
               <a:lnSpc>
                 <a:spcPct val="133000"/>
               </a:lnSpc>
@@ -6777,7 +6570,7 @@
           <a:bodyPr wrap="none" lIns="0" tIns="0" rIns="0" bIns="0" rtlCol="0" anchor="t"/>
           <a:lstStyle/>
           <a:p>
-            <a:pPr algn="l" indent="0" marL="0">
+            <a:pPr marL="0" indent="0" algn="l">
               <a:lnSpc>
                 <a:spcPct val="133000"/>
               </a:lnSpc>
@@ -6819,7 +6612,7 @@
           <a:bodyPr wrap="none" lIns="0" tIns="0" rIns="0" bIns="0" rtlCol="0" anchor="t"/>
           <a:lstStyle/>
           <a:p>
-            <a:pPr algn="l" indent="0" marL="0">
+            <a:pPr marL="0" indent="0" algn="l">
               <a:lnSpc>
                 <a:spcPct val="133000"/>
               </a:lnSpc>
@@ -6861,7 +6654,7 @@
           <a:bodyPr wrap="none" lIns="0" tIns="0" rIns="0" bIns="0" rtlCol="0" anchor="t"/>
           <a:lstStyle/>
           <a:p>
-            <a:pPr algn="l" indent="0" marL="0">
+            <a:pPr marL="0" indent="0" algn="l">
               <a:lnSpc>
                 <a:spcPct val="133000"/>
               </a:lnSpc>
@@ -6903,7 +6696,7 @@
           <a:bodyPr wrap="none" lIns="0" tIns="0" rIns="0" bIns="0" rtlCol="0" anchor="t"/>
           <a:lstStyle/>
           <a:p>
-            <a:pPr algn="l" indent="0" marL="0">
+            <a:pPr marL="0" indent="0" algn="l">
               <a:lnSpc>
                 <a:spcPct val="133000"/>
               </a:lnSpc>
@@ -6945,7 +6738,7 @@
           <a:bodyPr wrap="none" lIns="0" tIns="0" rIns="0" bIns="0" rtlCol="0" anchor="t"/>
           <a:lstStyle/>
           <a:p>
-            <a:pPr algn="l" indent="0" marL="0">
+            <a:pPr marL="0" indent="0" algn="l">
               <a:lnSpc>
                 <a:spcPct val="133000"/>
               </a:lnSpc>
@@ -6987,7 +6780,7 @@
           <a:bodyPr wrap="none" lIns="0" tIns="0" rIns="0" bIns="0" rtlCol="0" anchor="t"/>
           <a:lstStyle/>
           <a:p>
-            <a:pPr algn="l" indent="0" marL="0">
+            <a:pPr marL="0" indent="0" algn="l">
               <a:lnSpc>
                 <a:spcPct val="133000"/>
               </a:lnSpc>
@@ -7029,7 +6822,7 @@
           <a:bodyPr wrap="none" lIns="0" tIns="0" rIns="0" bIns="0" rtlCol="0" anchor="t"/>
           <a:lstStyle/>
           <a:p>
-            <a:pPr algn="l" indent="0" marL="0">
+            <a:pPr marL="0" indent="0" algn="l">
               <a:lnSpc>
                 <a:spcPct val="133000"/>
               </a:lnSpc>
@@ -7071,7 +6864,7 @@
           <a:bodyPr wrap="none" lIns="0" tIns="0" rIns="0" bIns="0" rtlCol="0" anchor="t"/>
           <a:lstStyle/>
           <a:p>
-            <a:pPr algn="l" indent="0" marL="0">
+            <a:pPr marL="0" indent="0" algn="l">
               <a:lnSpc>
                 <a:spcPct val="133000"/>
               </a:lnSpc>
@@ -7113,7 +6906,7 @@
           <a:bodyPr wrap="none" lIns="0" tIns="0" rIns="0" bIns="0" rtlCol="0" anchor="t"/>
           <a:lstStyle/>
           <a:p>
-            <a:pPr algn="l" indent="0" marL="0">
+            <a:pPr marL="0" indent="0" algn="l">
               <a:lnSpc>
                 <a:spcPct val="133000"/>
               </a:lnSpc>
@@ -7155,7 +6948,7 @@
           <a:bodyPr wrap="none" lIns="0" tIns="0" rIns="0" bIns="0" rtlCol="0" anchor="t"/>
           <a:lstStyle/>
           <a:p>
-            <a:pPr algn="l" indent="0" marL="0">
+            <a:pPr marL="0" indent="0" algn="l">
               <a:lnSpc>
                 <a:spcPct val="133000"/>
               </a:lnSpc>
@@ -7197,7 +6990,7 @@
           <a:bodyPr wrap="none" lIns="0" tIns="0" rIns="0" bIns="0" rtlCol="0" anchor="t"/>
           <a:lstStyle/>
           <a:p>
-            <a:pPr algn="l" indent="0" marL="0">
+            <a:pPr marL="0" indent="0" algn="l">
               <a:lnSpc>
                 <a:spcPct val="133000"/>
               </a:lnSpc>
@@ -7220,17 +7013,17 @@
       </p:sp>
       <p:pic>
         <p:nvPicPr>
-          <p:cNvPr id="27" name="Image 0" descr="preencoded.png">    </p:cNvPr>
+          <p:cNvPr id="27" name="Image 0" descr="preencoded.png"/>
           <p:cNvPicPr>
             <a:picLocks noChangeAspect="1"/>
           </p:cNvPicPr>
           <p:nvPr/>
         </p:nvPicPr>
         <p:blipFill>
-          <a:blip r:embed="rId1">
+          <a:blip>
             <a:extLst>
               <a:ext uri="{96DAC541-7B7A-43D3-8B79-37D633B846F1}">
-                <asvg:svgBlip xmlns:asvg="http://schemas.microsoft.com/office/drawing/2016/SVG/main" r:embed="rId2"/>
+                <asvg:svgBlip xmlns:asvg="http://schemas.microsoft.com/office/drawing/2016/SVG/main" r:embed="rId3"/>
               </a:ext>
             </a:extLst>
           </a:blip>
@@ -7269,7 +7062,7 @@
           <a:bodyPr wrap="none" lIns="0" tIns="0" rIns="0" bIns="0" rtlCol="0" anchor="t"/>
           <a:lstStyle/>
           <a:p>
-            <a:pPr algn="l" indent="0" marL="0">
+            <a:pPr marL="0" indent="0" algn="l">
               <a:lnSpc>
                 <a:spcPct val="104000"/>
               </a:lnSpc>
@@ -7313,7 +7106,7 @@
           </a:bodyPr>
           <a:lstStyle/>
           <a:p>
-            <a:pPr algn="l" indent="0" marL="0">
+            <a:pPr marL="0" indent="0" algn="l">
               <a:lnSpc>
                 <a:spcPct val="133000"/>
               </a:lnSpc>
@@ -7336,17 +7129,17 @@
       </p:sp>
       <p:pic>
         <p:nvPicPr>
-          <p:cNvPr id="30" name="Image 1" descr="preencoded.png">    </p:cNvPr>
+          <p:cNvPr id="30" name="Image 1" descr="preencoded.png"/>
           <p:cNvPicPr>
             <a:picLocks noChangeAspect="1"/>
           </p:cNvPicPr>
           <p:nvPr/>
         </p:nvPicPr>
         <p:blipFill>
-          <a:blip r:embed="rId3">
+          <a:blip>
             <a:extLst>
               <a:ext uri="{96DAC541-7B7A-43D3-8B79-37D633B846F1}">
-                <asvg:svgBlip xmlns:asvg="http://schemas.microsoft.com/office/drawing/2016/SVG/main" r:embed="rId4"/>
+                <asvg:svgBlip xmlns:asvg="http://schemas.microsoft.com/office/drawing/2016/SVG/main" r:embed="rId3"/>
               </a:ext>
             </a:extLst>
           </a:blip>
@@ -7385,7 +7178,7 @@
           <a:bodyPr wrap="none" lIns="0" tIns="0" rIns="0" bIns="0" rtlCol="0" anchor="t"/>
           <a:lstStyle/>
           <a:p>
-            <a:pPr algn="l" indent="0" marL="0">
+            <a:pPr marL="0" indent="0" algn="l">
               <a:lnSpc>
                 <a:spcPct val="104000"/>
               </a:lnSpc>
@@ -7429,7 +7222,7 @@
           </a:bodyPr>
           <a:lstStyle/>
           <a:p>
-            <a:pPr algn="l" indent="0" marL="0">
+            <a:pPr marL="0" indent="0" algn="l">
               <a:lnSpc>
                 <a:spcPct val="133000"/>
               </a:lnSpc>
@@ -7452,17 +7245,17 @@
       </p:sp>
       <p:pic>
         <p:nvPicPr>
-          <p:cNvPr id="33" name="Image 2" descr="preencoded.png">    </p:cNvPr>
+          <p:cNvPr id="33" name="Image 2" descr="preencoded.png"/>
           <p:cNvPicPr>
             <a:picLocks noChangeAspect="1"/>
           </p:cNvPicPr>
           <p:nvPr/>
         </p:nvPicPr>
         <p:blipFill>
-          <a:blip r:embed="rId5">
+          <a:blip>
             <a:extLst>
               <a:ext uri="{96DAC541-7B7A-43D3-8B79-37D633B846F1}">
-                <asvg:svgBlip xmlns:asvg="http://schemas.microsoft.com/office/drawing/2016/SVG/main" r:embed="rId6"/>
+                <asvg:svgBlip xmlns:asvg="http://schemas.microsoft.com/office/drawing/2016/SVG/main" r:embed="rId3"/>
               </a:ext>
             </a:extLst>
           </a:blip>
@@ -7501,7 +7294,7 @@
           <a:bodyPr wrap="none" lIns="0" tIns="0" rIns="0" bIns="0" rtlCol="0" anchor="t"/>
           <a:lstStyle/>
           <a:p>
-            <a:pPr algn="l" indent="0" marL="0">
+            <a:pPr marL="0" indent="0" algn="l">
               <a:lnSpc>
                 <a:spcPct val="104000"/>
               </a:lnSpc>
@@ -7545,7 +7338,7 @@
           </a:bodyPr>
           <a:lstStyle/>
           <a:p>
-            <a:pPr algn="l" indent="0" marL="0">
+            <a:pPr marL="0" indent="0" algn="l">
               <a:lnSpc>
                 <a:spcPct val="133000"/>
               </a:lnSpc>
@@ -7587,7 +7380,7 @@
           <a:bodyPr wrap="none" lIns="0" tIns="0" rIns="0" bIns="0" rtlCol="0" anchor="t"/>
           <a:lstStyle/>
           <a:p>
-            <a:pPr algn="l" indent="0" marL="0">
+            <a:pPr marL="0" indent="0" algn="l">
               <a:lnSpc>
                 <a:spcPct val="133000"/>
               </a:lnSpc>
@@ -7654,7 +7447,7 @@
           <a:bodyPr wrap="none" lIns="0" tIns="0" rIns="0" bIns="0" rtlCol="0" anchor="t"/>
           <a:lstStyle/>
           <a:p>
-            <a:pPr algn="l" indent="0" marL="0">
+            <a:pPr marL="0" indent="0" algn="l">
               <a:lnSpc>
                 <a:spcPct val="104000"/>
               </a:lnSpc>
@@ -7696,7 +7489,7 @@
           <a:bodyPr wrap="none" lIns="0" tIns="0" rIns="0" bIns="0" rtlCol="0" anchor="t"/>
           <a:lstStyle/>
           <a:p>
-            <a:pPr algn="l" indent="0" marL="0">
+            <a:pPr marL="0" indent="0" algn="l">
               <a:lnSpc>
                 <a:spcPct val="104000"/>
               </a:lnSpc>
@@ -7738,7 +7531,7 @@
           <a:bodyPr wrap="none" lIns="0" tIns="0" rIns="0" bIns="0" rtlCol="0" anchor="t"/>
           <a:lstStyle/>
           <a:p>
-            <a:pPr algn="l" indent="0" marL="0">
+            <a:pPr marL="0" indent="0" algn="l">
               <a:lnSpc>
                 <a:spcPct val="126000"/>
               </a:lnSpc>
@@ -7785,6 +7578,13 @@
             <a:prstDash val="solid"/>
           </a:ln>
         </p:spPr>
+        <p:txBody>
+          <a:bodyPr/>
+          <a:lstStyle/>
+          <a:p>
+            <a:endParaRPr lang="en-US"/>
+          </a:p>
+        </p:txBody>
       </p:sp>
       <p:sp>
         <p:nvSpPr>
@@ -7807,6 +7607,13 @@
           </a:solidFill>
           <a:ln/>
         </p:spPr>
+        <p:txBody>
+          <a:bodyPr/>
+          <a:lstStyle/>
+          <a:p>
+            <a:endParaRPr lang="en-US"/>
+          </a:p>
+        </p:txBody>
       </p:sp>
       <p:sp>
         <p:nvSpPr>
@@ -7829,6 +7636,13 @@
           </a:solidFill>
           <a:ln/>
         </p:spPr>
+        <p:txBody>
+          <a:bodyPr/>
+          <a:lstStyle/>
+          <a:p>
+            <a:endParaRPr lang="en-US"/>
+          </a:p>
+        </p:txBody>
       </p:sp>
       <p:sp>
         <p:nvSpPr>
@@ -7851,6 +7665,13 @@
           </a:solidFill>
           <a:ln/>
         </p:spPr>
+        <p:txBody>
+          <a:bodyPr/>
+          <a:lstStyle/>
+          <a:p>
+            <a:endParaRPr lang="en-US"/>
+          </a:p>
+        </p:txBody>
       </p:sp>
       <p:sp>
         <p:nvSpPr>
@@ -7873,6 +7694,13 @@
           </a:solidFill>
           <a:ln/>
         </p:spPr>
+        <p:txBody>
+          <a:bodyPr/>
+          <a:lstStyle/>
+          <a:p>
+            <a:endParaRPr lang="en-US"/>
+          </a:p>
+        </p:txBody>
       </p:sp>
       <p:sp>
         <p:nvSpPr>
@@ -7895,6 +7723,13 @@
           </a:solidFill>
           <a:ln/>
         </p:spPr>
+        <p:txBody>
+          <a:bodyPr/>
+          <a:lstStyle/>
+          <a:p>
+            <a:endParaRPr lang="en-US"/>
+          </a:p>
+        </p:txBody>
       </p:sp>
       <p:sp>
         <p:nvSpPr>
@@ -7917,6 +7752,13 @@
           </a:solidFill>
           <a:ln/>
         </p:spPr>
+        <p:txBody>
+          <a:bodyPr/>
+          <a:lstStyle/>
+          <a:p>
+            <a:endParaRPr lang="en-US"/>
+          </a:p>
+        </p:txBody>
       </p:sp>
       <p:sp>
         <p:nvSpPr>
@@ -7939,7 +7781,7 @@
           <a:bodyPr wrap="none" lIns="0" tIns="0" rIns="0" bIns="0" rtlCol="0" anchor="t"/>
           <a:lstStyle/>
           <a:p>
-            <a:pPr algn="l" indent="0" marL="0">
+            <a:pPr marL="0" indent="0" algn="l">
               <a:lnSpc>
                 <a:spcPct val="126000"/>
               </a:lnSpc>
@@ -7981,7 +7823,7 @@
           <a:bodyPr wrap="none" lIns="0" tIns="0" rIns="0" bIns="0" rtlCol="0" anchor="t"/>
           <a:lstStyle/>
           <a:p>
-            <a:pPr algn="l" indent="0" marL="0">
+            <a:pPr marL="0" indent="0" algn="l">
               <a:lnSpc>
                 <a:spcPct val="126000"/>
               </a:lnSpc>
@@ -8023,7 +7865,7 @@
           <a:bodyPr wrap="none" lIns="0" tIns="0" rIns="0" bIns="0" rtlCol="0" anchor="t"/>
           <a:lstStyle/>
           <a:p>
-            <a:pPr algn="l" indent="0" marL="0">
+            <a:pPr marL="0" indent="0" algn="l">
               <a:lnSpc>
                 <a:spcPct val="126000"/>
               </a:lnSpc>
@@ -8065,7 +7907,7 @@
           <a:bodyPr wrap="none" lIns="0" tIns="0" rIns="0" bIns="0" rtlCol="0" anchor="t"/>
           <a:lstStyle/>
           <a:p>
-            <a:pPr algn="l" indent="0" marL="0">
+            <a:pPr marL="0" indent="0" algn="l">
               <a:lnSpc>
                 <a:spcPct val="126000"/>
               </a:lnSpc>
@@ -8107,7 +7949,7 @@
           <a:bodyPr wrap="none" lIns="0" tIns="0" rIns="0" bIns="0" rtlCol="0" anchor="t"/>
           <a:lstStyle/>
           <a:p>
-            <a:pPr algn="l" indent="0" marL="0">
+            <a:pPr marL="0" indent="0" algn="l">
               <a:lnSpc>
                 <a:spcPct val="126000"/>
               </a:lnSpc>
@@ -8149,7 +7991,7 @@
           <a:bodyPr wrap="none" lIns="0" tIns="0" rIns="0" bIns="0" rtlCol="0" anchor="t"/>
           <a:lstStyle/>
           <a:p>
-            <a:pPr algn="l" indent="0" marL="0">
+            <a:pPr marL="0" indent="0" algn="l">
               <a:lnSpc>
                 <a:spcPct val="126000"/>
               </a:lnSpc>
@@ -8191,7 +8033,7 @@
           <a:bodyPr wrap="none" lIns="0" tIns="0" rIns="0" bIns="0" rtlCol="0" anchor="t"/>
           <a:lstStyle/>
           <a:p>
-            <a:pPr algn="l" indent="0" marL="0">
+            <a:pPr marL="0" indent="0" algn="l">
               <a:lnSpc>
                 <a:spcPct val="126000"/>
               </a:lnSpc>
@@ -8233,7 +8075,7 @@
           <a:bodyPr wrap="none" lIns="0" tIns="0" rIns="0" bIns="0" rtlCol="0" anchor="t"/>
           <a:lstStyle/>
           <a:p>
-            <a:pPr algn="l" indent="0" marL="0">
+            <a:pPr marL="0" indent="0" algn="l">
               <a:lnSpc>
                 <a:spcPct val="126000"/>
               </a:lnSpc>
@@ -8275,7 +8117,7 @@
           <a:bodyPr wrap="none" lIns="0" tIns="0" rIns="0" bIns="0" rtlCol="0" anchor="t"/>
           <a:lstStyle/>
           <a:p>
-            <a:pPr algn="l" indent="0" marL="0">
+            <a:pPr marL="0" indent="0" algn="l">
               <a:lnSpc>
                 <a:spcPct val="126000"/>
               </a:lnSpc>
@@ -8317,7 +8159,7 @@
           <a:bodyPr wrap="none" lIns="0" tIns="0" rIns="0" bIns="0" rtlCol="0" anchor="t"/>
           <a:lstStyle/>
           <a:p>
-            <a:pPr algn="l" indent="0" marL="0">
+            <a:pPr marL="0" indent="0" algn="l">
               <a:lnSpc>
                 <a:spcPct val="126000"/>
               </a:lnSpc>
@@ -8359,7 +8201,7 @@
           <a:bodyPr wrap="none" lIns="0" tIns="0" rIns="0" bIns="0" rtlCol="0" anchor="t"/>
           <a:lstStyle/>
           <a:p>
-            <a:pPr algn="l" indent="0" marL="0">
+            <a:pPr marL="0" indent="0" algn="l">
               <a:lnSpc>
                 <a:spcPct val="126000"/>
               </a:lnSpc>
@@ -8401,7 +8243,7 @@
           <a:bodyPr wrap="none" lIns="0" tIns="0" rIns="0" bIns="0" rtlCol="0" anchor="t"/>
           <a:lstStyle/>
           <a:p>
-            <a:pPr algn="l" indent="0" marL="0">
+            <a:pPr marL="0" indent="0" algn="l">
               <a:lnSpc>
                 <a:spcPct val="126000"/>
               </a:lnSpc>
@@ -8443,7 +8285,7 @@
           <a:bodyPr wrap="none" lIns="0" tIns="0" rIns="0" bIns="0" rtlCol="0" anchor="t"/>
           <a:lstStyle/>
           <a:p>
-            <a:pPr algn="l" indent="0" marL="0">
+            <a:pPr marL="0" indent="0" algn="l">
               <a:lnSpc>
                 <a:spcPct val="126000"/>
               </a:lnSpc>
@@ -8485,7 +8327,7 @@
           <a:bodyPr wrap="none" lIns="0" tIns="0" rIns="0" bIns="0" rtlCol="0" anchor="t"/>
           <a:lstStyle/>
           <a:p>
-            <a:pPr algn="l" indent="0" marL="0">
+            <a:pPr marL="0" indent="0" algn="l">
               <a:lnSpc>
                 <a:spcPct val="126000"/>
               </a:lnSpc>
@@ -8529,7 +8371,7 @@
           </a:bodyPr>
           <a:lstStyle/>
           <a:p>
-            <a:pPr algn="l" indent="0" marL="0">
+            <a:pPr marL="0" indent="0" algn="l">
               <a:lnSpc>
                 <a:spcPct val="126000"/>
               </a:lnSpc>
@@ -8851,4 +8693,319 @@
     </a:ext>
   </a:extLst>
 </a:theme>
+</file>
+
+<file path=ppt/theme/theme2.xml><?xml version="1.0" encoding="utf-8"?>
+<a:theme xmlns:a="http://schemas.openxmlformats.org/drawingml/2006/main" name="Office Theme">
+  <a:themeElements>
+    <a:clrScheme name="Office">
+      <a:dk1>
+        <a:sysClr val="windowText" lastClr="000000"/>
+      </a:dk1>
+      <a:lt1>
+        <a:sysClr val="window" lastClr="FFFFFF"/>
+      </a:lt1>
+      <a:dk2>
+        <a:srgbClr val="0E2841"/>
+      </a:dk2>
+      <a:lt2>
+        <a:srgbClr val="E8E8E8"/>
+      </a:lt2>
+      <a:accent1>
+        <a:srgbClr val="156082"/>
+      </a:accent1>
+      <a:accent2>
+        <a:srgbClr val="E97132"/>
+      </a:accent2>
+      <a:accent3>
+        <a:srgbClr val="196B24"/>
+      </a:accent3>
+      <a:accent4>
+        <a:srgbClr val="0F9ED5"/>
+      </a:accent4>
+      <a:accent5>
+        <a:srgbClr val="A02B93"/>
+      </a:accent5>
+      <a:accent6>
+        <a:srgbClr val="4EA72E"/>
+      </a:accent6>
+      <a:hlink>
+        <a:srgbClr val="467886"/>
+      </a:hlink>
+      <a:folHlink>
+        <a:srgbClr val="96607D"/>
+      </a:folHlink>
+    </a:clrScheme>
+    <a:fontScheme name="Office">
+      <a:majorFont>
+        <a:latin typeface="Aptos Display" panose="02110004020202020204"/>
+        <a:ea typeface=""/>
+        <a:cs typeface=""/>
+        <a:font script="Jpan" typeface="游ゴシック Light"/>
+        <a:font script="Hang" typeface="맑은 고딕"/>
+        <a:font script="Hans" typeface="等线 Light"/>
+        <a:font script="Hant" typeface="新細明體"/>
+        <a:font script="Arab" typeface="Times New Roman"/>
+        <a:font script="Hebr" typeface="Times New Roman"/>
+        <a:font script="Thai" typeface="Angsana New"/>
+        <a:font script="Ethi" typeface="Nyala"/>
+        <a:font script="Beng" typeface="Vrinda"/>
+        <a:font script="Gujr" typeface="Shruti"/>
+        <a:font script="Khmr" typeface="MoolBoran"/>
+        <a:font script="Knda" typeface="Tunga"/>
+        <a:font script="Guru" typeface="Raavi"/>
+        <a:font script="Cans" typeface="Euphemia"/>
+        <a:font script="Cher" typeface="Plantagenet Cherokee"/>
+        <a:font script="Yiii" typeface="Microsoft Yi Baiti"/>
+        <a:font script="Tibt" typeface="Microsoft Himalaya"/>
+        <a:font script="Thaa" typeface="MV Boli"/>
+        <a:font script="Deva" typeface="Mangal"/>
+        <a:font script="Telu" typeface="Gautami"/>
+        <a:font script="Taml" typeface="Latha"/>
+        <a:font script="Syrc" typeface="Estrangelo Edessa"/>
+        <a:font script="Orya" typeface="Kalinga"/>
+        <a:font script="Mlym" typeface="Kartika"/>
+        <a:font script="Laoo" typeface="DokChampa"/>
+        <a:font script="Sinh" typeface="Iskoola Pota"/>
+        <a:font script="Mong" typeface="Mongolian Baiti"/>
+        <a:font script="Viet" typeface="Times New Roman"/>
+        <a:font script="Uigh" typeface="Microsoft Uighur"/>
+        <a:font script="Geor" typeface="Sylfaen"/>
+        <a:font script="Armn" typeface="Arial"/>
+        <a:font script="Bugi" typeface="Leelawadee UI"/>
+        <a:font script="Bopo" typeface="Microsoft JhengHei"/>
+        <a:font script="Java" typeface="Javanese Text"/>
+        <a:font script="Lisu" typeface="Segoe UI"/>
+        <a:font script="Mymr" typeface="Myanmar Text"/>
+        <a:font script="Nkoo" typeface="Ebrima"/>
+        <a:font script="Olck" typeface="Nirmala UI"/>
+        <a:font script="Osma" typeface="Ebrima"/>
+        <a:font script="Phag" typeface="Phagspa"/>
+        <a:font script="Syrn" typeface="Estrangelo Edessa"/>
+        <a:font script="Syrj" typeface="Estrangelo Edessa"/>
+        <a:font script="Syre" typeface="Estrangelo Edessa"/>
+        <a:font script="Sora" typeface="Nirmala UI"/>
+        <a:font script="Tale" typeface="Microsoft Tai Le"/>
+        <a:font script="Talu" typeface="Microsoft New Tai Lue"/>
+        <a:font script="Tfng" typeface="Ebrima"/>
+      </a:majorFont>
+      <a:minorFont>
+        <a:latin typeface="Aptos" panose="02110004020202020204"/>
+        <a:ea typeface=""/>
+        <a:cs typeface=""/>
+        <a:font script="Jpan" typeface="游ゴシック"/>
+        <a:font script="Hang" typeface="맑은 고딕"/>
+        <a:font script="Hans" typeface="等线"/>
+        <a:font script="Hant" typeface="新細明體"/>
+        <a:font script="Arab" typeface="Arial"/>
+        <a:font script="Hebr" typeface="Arial"/>
+        <a:font script="Thai" typeface="Cordia New"/>
+        <a:font script="Ethi" typeface="Nyala"/>
+        <a:font script="Beng" typeface="Vrinda"/>
+        <a:font script="Gujr" typeface="Shruti"/>
+        <a:font script="Khmr" typeface="DaunPenh"/>
+        <a:font script="Knda" typeface="Tunga"/>
+        <a:font script="Guru" typeface="Raavi"/>
+        <a:font script="Cans" typeface="Euphemia"/>
+        <a:font script="Cher" typeface="Plantagenet Cherokee"/>
+        <a:font script="Yiii" typeface="Microsoft Yi Baiti"/>
+        <a:font script="Tibt" typeface="Microsoft Himalaya"/>
+        <a:font script="Thaa" typeface="MV Boli"/>
+        <a:font script="Deva" typeface="Mangal"/>
+        <a:font script="Telu" typeface="Gautami"/>
+        <a:font script="Taml" typeface="Latha"/>
+        <a:font script="Syrc" typeface="Estrangelo Edessa"/>
+        <a:font script="Orya" typeface="Kalinga"/>
+        <a:font script="Mlym" typeface="Kartika"/>
+        <a:font script="Laoo" typeface="DokChampa"/>
+        <a:font script="Sinh" typeface="Iskoola Pota"/>
+        <a:font script="Mong" typeface="Mongolian Baiti"/>
+        <a:font script="Viet" typeface="Arial"/>
+        <a:font script="Uigh" typeface="Microsoft Uighur"/>
+        <a:font script="Geor" typeface="Sylfaen"/>
+        <a:font script="Armn" typeface="Arial"/>
+        <a:font script="Bugi" typeface="Leelawadee UI"/>
+        <a:font script="Bopo" typeface="Microsoft JhengHei"/>
+        <a:font script="Java" typeface="Javanese Text"/>
+        <a:font script="Lisu" typeface="Segoe UI"/>
+        <a:font script="Mymr" typeface="Myanmar Text"/>
+        <a:font script="Nkoo" typeface="Ebrima"/>
+        <a:font script="Olck" typeface="Nirmala UI"/>
+        <a:font script="Osma" typeface="Ebrima"/>
+        <a:font script="Phag" typeface="Phagspa"/>
+        <a:font script="Syrn" typeface="Estrangelo Edessa"/>
+        <a:font script="Syrj" typeface="Estrangelo Edessa"/>
+        <a:font script="Syre" typeface="Estrangelo Edessa"/>
+        <a:font script="Sora" typeface="Nirmala UI"/>
+        <a:font script="Tale" typeface="Microsoft Tai Le"/>
+        <a:font script="Talu" typeface="Microsoft New Tai Lue"/>
+        <a:font script="Tfng" typeface="Ebrima"/>
+      </a:minorFont>
+    </a:fontScheme>
+    <a:fmtScheme name="Office">
+      <a:fillStyleLst>
+        <a:solidFill>
+          <a:schemeClr val="phClr"/>
+        </a:solidFill>
+        <a:gradFill rotWithShape="1">
+          <a:gsLst>
+            <a:gs pos="0">
+              <a:schemeClr val="phClr">
+                <a:lumMod val="110000"/>
+                <a:satMod val="105000"/>
+                <a:tint val="67000"/>
+              </a:schemeClr>
+            </a:gs>
+            <a:gs pos="50000">
+              <a:schemeClr val="phClr">
+                <a:lumMod val="105000"/>
+                <a:satMod val="103000"/>
+                <a:tint val="73000"/>
+              </a:schemeClr>
+            </a:gs>
+            <a:gs pos="100000">
+              <a:schemeClr val="phClr">
+                <a:lumMod val="105000"/>
+                <a:satMod val="109000"/>
+                <a:tint val="81000"/>
+              </a:schemeClr>
+            </a:gs>
+          </a:gsLst>
+          <a:lin ang="5400000" scaled="0"/>
+        </a:gradFill>
+        <a:gradFill rotWithShape="1">
+          <a:gsLst>
+            <a:gs pos="0">
+              <a:schemeClr val="phClr">
+                <a:satMod val="103000"/>
+                <a:lumMod val="102000"/>
+                <a:tint val="94000"/>
+              </a:schemeClr>
+            </a:gs>
+            <a:gs pos="50000">
+              <a:schemeClr val="phClr">
+                <a:satMod val="110000"/>
+                <a:lumMod val="100000"/>
+                <a:shade val="100000"/>
+              </a:schemeClr>
+            </a:gs>
+            <a:gs pos="100000">
+              <a:schemeClr val="phClr">
+                <a:lumMod val="99000"/>
+                <a:satMod val="120000"/>
+                <a:shade val="78000"/>
+              </a:schemeClr>
+            </a:gs>
+          </a:gsLst>
+          <a:lin ang="5400000" scaled="0"/>
+        </a:gradFill>
+      </a:fillStyleLst>
+      <a:lnStyleLst>
+        <a:ln w="12700" cap="flat" cmpd="sng" algn="ctr">
+          <a:solidFill>
+            <a:schemeClr val="phClr"/>
+          </a:solidFill>
+          <a:prstDash val="solid"/>
+          <a:miter lim="800000"/>
+        </a:ln>
+        <a:ln w="19050" cap="flat" cmpd="sng" algn="ctr">
+          <a:solidFill>
+            <a:schemeClr val="phClr"/>
+          </a:solidFill>
+          <a:prstDash val="solid"/>
+          <a:miter lim="800000"/>
+        </a:ln>
+        <a:ln w="25400" cap="flat" cmpd="sng" algn="ctr">
+          <a:solidFill>
+            <a:schemeClr val="phClr"/>
+          </a:solidFill>
+          <a:prstDash val="solid"/>
+          <a:miter lim="800000"/>
+        </a:ln>
+      </a:lnStyleLst>
+      <a:effectStyleLst>
+        <a:effectStyle>
+          <a:effectLst/>
+        </a:effectStyle>
+        <a:effectStyle>
+          <a:effectLst/>
+        </a:effectStyle>
+        <a:effectStyle>
+          <a:effectLst>
+            <a:outerShdw blurRad="57150" dist="19050" dir="5400000" algn="ctr" rotWithShape="0">
+              <a:srgbClr val="000000">
+                <a:alpha val="63000"/>
+              </a:srgbClr>
+            </a:outerShdw>
+          </a:effectLst>
+        </a:effectStyle>
+      </a:effectStyleLst>
+      <a:bgFillStyleLst>
+        <a:solidFill>
+          <a:schemeClr val="phClr"/>
+        </a:solidFill>
+        <a:solidFill>
+          <a:schemeClr val="phClr">
+            <a:tint val="95000"/>
+            <a:satMod val="170000"/>
+          </a:schemeClr>
+        </a:solidFill>
+        <a:gradFill rotWithShape="1">
+          <a:gsLst>
+            <a:gs pos="0">
+              <a:schemeClr val="phClr">
+                <a:tint val="93000"/>
+                <a:satMod val="150000"/>
+                <a:shade val="98000"/>
+                <a:lumMod val="102000"/>
+              </a:schemeClr>
+            </a:gs>
+            <a:gs pos="50000">
+              <a:schemeClr val="phClr">
+                <a:tint val="98000"/>
+                <a:satMod val="130000"/>
+                <a:shade val="90000"/>
+                <a:lumMod val="103000"/>
+              </a:schemeClr>
+            </a:gs>
+            <a:gs pos="100000">
+              <a:schemeClr val="phClr">
+                <a:shade val="63000"/>
+                <a:satMod val="120000"/>
+              </a:schemeClr>
+            </a:gs>
+          </a:gsLst>
+          <a:lin ang="5400000" scaled="0"/>
+        </a:gradFill>
+      </a:bgFillStyleLst>
+    </a:fmtScheme>
+  </a:themeElements>
+  <a:objectDefaults>
+    <a:lnDef>
+      <a:spPr/>
+      <a:bodyPr/>
+      <a:lstStyle/>
+      <a:style>
+        <a:lnRef idx="2">
+          <a:schemeClr val="accent1"/>
+        </a:lnRef>
+        <a:fillRef idx="0">
+          <a:schemeClr val="accent1"/>
+        </a:fillRef>
+        <a:effectRef idx="1">
+          <a:schemeClr val="accent1"/>
+        </a:effectRef>
+        <a:fontRef idx="minor">
+          <a:schemeClr val="tx1"/>
+        </a:fontRef>
+      </a:style>
+    </a:lnDef>
+  </a:objectDefaults>
+  <a:extraClrSchemeLst/>
+  <a:extLst>
+    <a:ext uri="{05A4C25C-085E-4340-85A3-A5531E510DB2}">
+      <thm15:themeFamily xmlns:thm15="http://schemas.microsoft.com/office/thememl/2012/main" name="Office Theme" id="{2E142A2C-CD16-42D6-873A-C26D2A0506FA}" vid="{1BDDFF52-6CD6-40A5-AB3C-68EB2F1E4D0A}"/>
+    </a:ext>
+  </a:extLst>
+</a:theme>
 </file>